--- a/projects/cns-pharmacology-practical/slides/ch05-epilepsy.pptx
+++ b/projects/cns-pharmacology-practical/slides/ch05-epilepsy.pptx
@@ -6972,7 +6972,7 @@
                 </a:solidFill>
                 <a:latin typeface="Calibri"/>
               </a:rPr>
-              <a:t>45 minutes  ·  10 questions</a:t>
+              <a:t>120 minutes  ·  10 questions</a:t>
             </a:r>
           </a:p>
         </p:txBody>
@@ -13273,7 +13273,7 @@
                 </a:solidFill>
                 <a:latin typeface="Cambria"/>
               </a:rPr>
-              <a:t>45</a:t>
+              <a:t>120</a:t>
             </a:r>
           </a:p>
           <a:p>

--- a/projects/cns-pharmacology-practical/slides/ch05-epilepsy.pptx
+++ b/projects/cns-pharmacology-practical/slides/ch05-epilepsy.pptx
@@ -5969,6 +5969,110 @@
         </p:nvSpPr>
         <p:spPr>
           <a:xfrm>
+            <a:off x="411479" y="1444752"/>
+            <a:ext cx="11368735" cy="4800600"/>
+          </a:xfrm>
+          <a:prstGeom prst="roundRect">
+            <a:avLst>
+              <a:gd name="adj" fmla="val 4000"/>
+            </a:avLst>
+          </a:prstGeom>
+          <a:solidFill>
+            <a:srgbClr val="FFFFFF">
+              <a:alpha val="84000"/>
+            </a:srgbClr>
+          </a:solidFill>
+          <a:ln w="19050">
+            <a:solidFill>
+              <a:srgbClr val="FFFFFF"/>
+            </a:solidFill>
+          </a:ln>
+          <a:effectLst>
+            <a:outerShdw blurRad="203200" dist="50800" dir="5400000" algn="t" rotWithShape="0">
+              <a:srgbClr val="1A2340">
+                <a:alpha val="20000"/>
+              </a:srgbClr>
+            </a:outerShdw>
+          </a:effectLst>
+        </p:spPr>
+        <p:style>
+          <a:lnRef idx="1">
+            <a:schemeClr val="accent1"/>
+          </a:lnRef>
+          <a:fillRef idx="3">
+            <a:schemeClr val="accent1"/>
+          </a:fillRef>
+          <a:effectRef idx="2">
+            <a:schemeClr val="accent1"/>
+          </a:effectRef>
+          <a:fontRef idx="minor">
+            <a:schemeClr val="lt1"/>
+          </a:fontRef>
+        </p:style>
+        <p:txBody>
+          <a:bodyPr rtlCol="0" anchor="ctr"/>
+          <a:lstStyle/>
+          <a:p>
+            <a:pPr algn="ctr"/>
+          </a:p>
+        </p:txBody>
+      </p:sp>
+      <p:sp>
+        <p:nvSpPr>
+          <p:cNvPr id="12" name="Rounded Rectangle 11"/>
+          <p:cNvSpPr/>
+          <p:nvPr/>
+        </p:nvSpPr>
+        <p:spPr>
+          <a:xfrm>
+            <a:off x="731519" y="1508760"/>
+            <a:ext cx="10728655" cy="32004"/>
+          </a:xfrm>
+          <a:prstGeom prst="roundRect">
+            <a:avLst>
+              <a:gd name="adj" fmla="val 50000"/>
+            </a:avLst>
+          </a:prstGeom>
+          <a:solidFill>
+            <a:srgbClr val="FFFFFF">
+              <a:alpha val="85000"/>
+            </a:srgbClr>
+          </a:solidFill>
+          <a:ln>
+            <a:noFill/>
+          </a:ln>
+          <a:effectLst/>
+        </p:spPr>
+        <p:style>
+          <a:lnRef idx="1">
+            <a:schemeClr val="accent1"/>
+          </a:lnRef>
+          <a:fillRef idx="3">
+            <a:schemeClr val="accent1"/>
+          </a:fillRef>
+          <a:effectRef idx="2">
+            <a:schemeClr val="accent1"/>
+          </a:effectRef>
+          <a:fontRef idx="minor">
+            <a:schemeClr val="lt1"/>
+          </a:fontRef>
+        </p:style>
+        <p:txBody>
+          <a:bodyPr rtlCol="0" anchor="ctr"/>
+          <a:lstStyle/>
+          <a:p>
+            <a:pPr algn="ctr"/>
+          </a:p>
+        </p:txBody>
+      </p:sp>
+      <p:sp>
+        <p:nvSpPr>
+          <p:cNvPr id="13" name="Rounded Rectangle 12"/>
+          <p:cNvSpPr/>
+          <p:nvPr/>
+        </p:nvSpPr>
+        <p:spPr>
+          <a:xfrm>
             <a:off x="1645919" y="2103120"/>
             <a:ext cx="8899855" cy="2794508"/>
           </a:xfrm>
@@ -6019,7 +6123,7 @@
       </p:sp>
       <p:sp>
         <p:nvSpPr>
-          <p:cNvPr id="12" name="Rounded Rectangle 11"/>
+          <p:cNvPr id="14" name="Rounded Rectangle 13"/>
           <p:cNvSpPr/>
           <p:nvPr/>
         </p:nvSpPr>
@@ -6067,7 +6171,7 @@
       </p:sp>
       <p:sp>
         <p:nvSpPr>
-          <p:cNvPr id="13" name="Rounded Rectangle 12"/>
+          <p:cNvPr id="15" name="Rounded Rectangle 14"/>
           <p:cNvSpPr/>
           <p:nvPr/>
         </p:nvSpPr>
@@ -6135,7 +6239,7 @@
       </p:sp>
       <p:sp>
         <p:nvSpPr>
-          <p:cNvPr id="14" name="TextBox 13"/>
+          <p:cNvPr id="16" name="TextBox 15"/>
           <p:cNvSpPr txBox="1"/>
           <p:nvPr/>
         </p:nvSpPr>
@@ -6573,14 +6677,177 @@
       </p:pic>
       <p:sp>
         <p:nvSpPr>
-          <p:cNvPr id="11" name="TextBox 10"/>
+          <p:cNvPr id="11" name="Rounded Rectangle 10"/>
+          <p:cNvSpPr/>
+          <p:nvPr/>
+        </p:nvSpPr>
+        <p:spPr>
+          <a:xfrm>
+            <a:off x="411479" y="1444752"/>
+            <a:ext cx="11368735" cy="4800600"/>
+          </a:xfrm>
+          <a:prstGeom prst="roundRect">
+            <a:avLst>
+              <a:gd name="adj" fmla="val 4000"/>
+            </a:avLst>
+          </a:prstGeom>
+          <a:solidFill>
+            <a:srgbClr val="FFFFFF">
+              <a:alpha val="84000"/>
+            </a:srgbClr>
+          </a:solidFill>
+          <a:ln w="19050">
+            <a:solidFill>
+              <a:srgbClr val="FFFFFF"/>
+            </a:solidFill>
+          </a:ln>
+          <a:effectLst>
+            <a:outerShdw blurRad="203200" dist="50800" dir="5400000" algn="t" rotWithShape="0">
+              <a:srgbClr val="1A2340">
+                <a:alpha val="20000"/>
+              </a:srgbClr>
+            </a:outerShdw>
+          </a:effectLst>
+        </p:spPr>
+        <p:style>
+          <a:lnRef idx="1">
+            <a:schemeClr val="accent1"/>
+          </a:lnRef>
+          <a:fillRef idx="3">
+            <a:schemeClr val="accent1"/>
+          </a:fillRef>
+          <a:effectRef idx="2">
+            <a:schemeClr val="accent1"/>
+          </a:effectRef>
+          <a:fontRef idx="minor">
+            <a:schemeClr val="lt1"/>
+          </a:fontRef>
+        </p:style>
+        <p:txBody>
+          <a:bodyPr rtlCol="0" anchor="ctr"/>
+          <a:lstStyle/>
+          <a:p>
+            <a:pPr algn="ctr"/>
+          </a:p>
+        </p:txBody>
+      </p:sp>
+      <p:sp>
+        <p:nvSpPr>
+          <p:cNvPr id="12" name="Rounded Rectangle 11"/>
+          <p:cNvSpPr/>
+          <p:nvPr/>
+        </p:nvSpPr>
+        <p:spPr>
+          <a:xfrm>
+            <a:off x="731519" y="1508760"/>
+            <a:ext cx="10728655" cy="32004"/>
+          </a:xfrm>
+          <a:prstGeom prst="roundRect">
+            <a:avLst>
+              <a:gd name="adj" fmla="val 50000"/>
+            </a:avLst>
+          </a:prstGeom>
+          <a:solidFill>
+            <a:srgbClr val="FFFFFF">
+              <a:alpha val="85000"/>
+            </a:srgbClr>
+          </a:solidFill>
+          <a:ln>
+            <a:noFill/>
+          </a:ln>
+          <a:effectLst/>
+        </p:spPr>
+        <p:style>
+          <a:lnRef idx="1">
+            <a:schemeClr val="accent1"/>
+          </a:lnRef>
+          <a:fillRef idx="3">
+            <a:schemeClr val="accent1"/>
+          </a:fillRef>
+          <a:effectRef idx="2">
+            <a:schemeClr val="accent1"/>
+          </a:effectRef>
+          <a:fontRef idx="minor">
+            <a:schemeClr val="lt1"/>
+          </a:fontRef>
+        </p:style>
+        <p:txBody>
+          <a:bodyPr rtlCol="0" anchor="ctr"/>
+          <a:lstStyle/>
+          <a:p>
+            <a:pPr algn="ctr"/>
+          </a:p>
+        </p:txBody>
+      </p:sp>
+      <p:sp>
+        <p:nvSpPr>
+          <p:cNvPr id="13" name="Rounded Rectangle 12"/>
+          <p:cNvSpPr/>
+          <p:nvPr/>
+        </p:nvSpPr>
+        <p:spPr>
+          <a:xfrm>
+            <a:off x="548640" y="1591056"/>
+            <a:ext cx="64008" cy="594360"/>
+          </a:xfrm>
+          <a:prstGeom prst="roundRect">
+            <a:avLst>
+              <a:gd name="adj" fmla="val 50000"/>
+            </a:avLst>
+          </a:prstGeom>
+          <a:solidFill>
+            <a:srgbClr val="8D6A2A"/>
+          </a:solidFill>
+          <a:ln>
+            <a:noFill/>
+          </a:ln>
+          <a:effectLst>
+            <a:outerShdw blurRad="203200" dist="50800" dir="5400000" algn="t" rotWithShape="0">
+              <a:srgbClr val="1A2340">
+                <a:alpha val="20000"/>
+              </a:srgbClr>
+            </a:outerShdw>
+          </a:effectLst>
+          <a:scene3d>
+            <a:camera prst="orthographicFront"/>
+            <a:lightRig rig="threePt" dir="t"/>
+          </a:scene3d>
+          <a:sp3d>
+            <a:bevelT w="44450" h="25400" prst="softRound"/>
+          </a:sp3d>
+        </p:spPr>
+        <p:style>
+          <a:lnRef idx="1">
+            <a:schemeClr val="accent1"/>
+          </a:lnRef>
+          <a:fillRef idx="3">
+            <a:schemeClr val="accent1"/>
+          </a:fillRef>
+          <a:effectRef idx="2">
+            <a:schemeClr val="accent1"/>
+          </a:effectRef>
+          <a:fontRef idx="minor">
+            <a:schemeClr val="lt1"/>
+          </a:fontRef>
+        </p:style>
+        <p:txBody>
+          <a:bodyPr rtlCol="0" anchor="ctr"/>
+          <a:lstStyle/>
+          <a:p>
+            <a:pPr algn="ctr"/>
+          </a:p>
+        </p:txBody>
+      </p:sp>
+      <p:sp>
+        <p:nvSpPr>
+          <p:cNvPr id="14" name="TextBox 13"/>
           <p:cNvSpPr txBox="1"/>
           <p:nvPr/>
         </p:nvSpPr>
         <p:spPr>
           <a:xfrm>
-            <a:off x="548640" y="1554480"/>
-            <a:ext cx="11094415" cy="795528"/>
+            <a:off x="777240" y="1554480"/>
+            <a:ext cx="10865815" cy="795528"/>
           </a:xfrm>
           <a:prstGeom prst="rect">
             <a:avLst/>
@@ -6612,7 +6879,7 @@
       </p:sp>
       <p:sp>
         <p:nvSpPr>
-          <p:cNvPr id="12" name="Oval 11"/>
+          <p:cNvPr id="15" name="Oval 14"/>
           <p:cNvSpPr/>
           <p:nvPr/>
         </p:nvSpPr>
@@ -6665,7 +6932,7 @@
       </p:sp>
       <p:sp>
         <p:nvSpPr>
-          <p:cNvPr id="13" name="TextBox 12"/>
+          <p:cNvPr id="16" name="TextBox 15"/>
           <p:cNvSpPr txBox="1"/>
           <p:nvPr/>
         </p:nvSpPr>
@@ -6726,7 +6993,7 @@
       </p:sp>
       <p:sp>
         <p:nvSpPr>
-          <p:cNvPr id="14" name="Oval 13"/>
+          <p:cNvPr id="17" name="Oval 16"/>
           <p:cNvSpPr/>
           <p:nvPr/>
         </p:nvSpPr>
@@ -6779,7 +7046,7 @@
       </p:sp>
       <p:sp>
         <p:nvSpPr>
-          <p:cNvPr id="15" name="TextBox 14"/>
+          <p:cNvPr id="18" name="TextBox 17"/>
           <p:cNvSpPr txBox="1"/>
           <p:nvPr/>
         </p:nvSpPr>
@@ -6822,7 +7089,7 @@
       </p:sp>
       <p:sp>
         <p:nvSpPr>
-          <p:cNvPr id="16" name="Oval 15"/>
+          <p:cNvPr id="19" name="Oval 18"/>
           <p:cNvSpPr/>
           <p:nvPr/>
         </p:nvSpPr>
@@ -6875,7 +7142,7 @@
       </p:sp>
       <p:sp>
         <p:nvSpPr>
-          <p:cNvPr id="17" name="TextBox 16"/>
+          <p:cNvPr id="20" name="TextBox 19"/>
           <p:cNvSpPr txBox="1"/>
           <p:nvPr/>
         </p:nvSpPr>
@@ -6918,7 +7185,7 @@
       </p:sp>
       <p:sp>
         <p:nvSpPr>
-          <p:cNvPr id="18" name="Oval 17"/>
+          <p:cNvPr id="21" name="Oval 20"/>
           <p:cNvSpPr/>
           <p:nvPr/>
         </p:nvSpPr>
@@ -6971,7 +7238,7 @@
       </p:sp>
       <p:sp>
         <p:nvSpPr>
-          <p:cNvPr id="19" name="TextBox 18"/>
+          <p:cNvPr id="22" name="TextBox 21"/>
           <p:cNvSpPr txBox="1"/>
           <p:nvPr/>
         </p:nvSpPr>
@@ -7393,9 +7660,113 @@
           </a:prstGeom>
         </p:spPr>
       </p:pic>
+      <p:sp>
+        <p:nvSpPr>
+          <p:cNvPr id="11" name="Rounded Rectangle 10"/>
+          <p:cNvSpPr/>
+          <p:nvPr/>
+        </p:nvSpPr>
+        <p:spPr>
+          <a:xfrm>
+            <a:off x="411479" y="1444752"/>
+            <a:ext cx="11368735" cy="4800600"/>
+          </a:xfrm>
+          <a:prstGeom prst="roundRect">
+            <a:avLst>
+              <a:gd name="adj" fmla="val 4000"/>
+            </a:avLst>
+          </a:prstGeom>
+          <a:solidFill>
+            <a:srgbClr val="FFFFFF">
+              <a:alpha val="84000"/>
+            </a:srgbClr>
+          </a:solidFill>
+          <a:ln w="19050">
+            <a:solidFill>
+              <a:srgbClr val="FFFFFF"/>
+            </a:solidFill>
+          </a:ln>
+          <a:effectLst>
+            <a:outerShdw blurRad="203200" dist="50800" dir="5400000" algn="t" rotWithShape="0">
+              <a:srgbClr val="1A2340">
+                <a:alpha val="20000"/>
+              </a:srgbClr>
+            </a:outerShdw>
+          </a:effectLst>
+        </p:spPr>
+        <p:style>
+          <a:lnRef idx="1">
+            <a:schemeClr val="accent1"/>
+          </a:lnRef>
+          <a:fillRef idx="3">
+            <a:schemeClr val="accent1"/>
+          </a:fillRef>
+          <a:effectRef idx="2">
+            <a:schemeClr val="accent1"/>
+          </a:effectRef>
+          <a:fontRef idx="minor">
+            <a:schemeClr val="lt1"/>
+          </a:fontRef>
+        </p:style>
+        <p:txBody>
+          <a:bodyPr rtlCol="0" anchor="ctr"/>
+          <a:lstStyle/>
+          <a:p>
+            <a:pPr algn="ctr"/>
+          </a:p>
+        </p:txBody>
+      </p:sp>
+      <p:sp>
+        <p:nvSpPr>
+          <p:cNvPr id="12" name="Rounded Rectangle 11"/>
+          <p:cNvSpPr/>
+          <p:nvPr/>
+        </p:nvSpPr>
+        <p:spPr>
+          <a:xfrm>
+            <a:off x="731519" y="1508760"/>
+            <a:ext cx="10728655" cy="32004"/>
+          </a:xfrm>
+          <a:prstGeom prst="roundRect">
+            <a:avLst>
+              <a:gd name="adj" fmla="val 50000"/>
+            </a:avLst>
+          </a:prstGeom>
+          <a:solidFill>
+            <a:srgbClr val="FFFFFF">
+              <a:alpha val="85000"/>
+            </a:srgbClr>
+          </a:solidFill>
+          <a:ln>
+            <a:noFill/>
+          </a:ln>
+          <a:effectLst/>
+        </p:spPr>
+        <p:style>
+          <a:lnRef idx="1">
+            <a:schemeClr val="accent1"/>
+          </a:lnRef>
+          <a:fillRef idx="3">
+            <a:schemeClr val="accent1"/>
+          </a:fillRef>
+          <a:effectRef idx="2">
+            <a:schemeClr val="accent1"/>
+          </a:effectRef>
+          <a:fontRef idx="minor">
+            <a:schemeClr val="lt1"/>
+          </a:fontRef>
+        </p:style>
+        <p:txBody>
+          <a:bodyPr rtlCol="0" anchor="ctr"/>
+          <a:lstStyle/>
+          <a:p>
+            <a:pPr algn="ctr"/>
+          </a:p>
+        </p:txBody>
+      </p:sp>
       <p:graphicFrame>
         <p:nvGraphicFramePr>
-          <p:cNvPr id="11" name="Table 10"/>
+          <p:cNvPr id="13" name="Table 12"/>
           <p:cNvGraphicFramePr>
             <a:graphicFrameLocks noGrp="1"/>
           </p:cNvGraphicFramePr>
@@ -8530,6 +8901,110 @@
         </p:nvSpPr>
         <p:spPr>
           <a:xfrm>
+            <a:off x="411479" y="1444752"/>
+            <a:ext cx="11368735" cy="4800600"/>
+          </a:xfrm>
+          <a:prstGeom prst="roundRect">
+            <a:avLst>
+              <a:gd name="adj" fmla="val 4000"/>
+            </a:avLst>
+          </a:prstGeom>
+          <a:solidFill>
+            <a:srgbClr val="FFFFFF">
+              <a:alpha val="84000"/>
+            </a:srgbClr>
+          </a:solidFill>
+          <a:ln w="19050">
+            <a:solidFill>
+              <a:srgbClr val="FFFFFF"/>
+            </a:solidFill>
+          </a:ln>
+          <a:effectLst>
+            <a:outerShdw blurRad="203200" dist="50800" dir="5400000" algn="t" rotWithShape="0">
+              <a:srgbClr val="1A2340">
+                <a:alpha val="20000"/>
+              </a:srgbClr>
+            </a:outerShdw>
+          </a:effectLst>
+        </p:spPr>
+        <p:style>
+          <a:lnRef idx="1">
+            <a:schemeClr val="accent1"/>
+          </a:lnRef>
+          <a:fillRef idx="3">
+            <a:schemeClr val="accent1"/>
+          </a:fillRef>
+          <a:effectRef idx="2">
+            <a:schemeClr val="accent1"/>
+          </a:effectRef>
+          <a:fontRef idx="minor">
+            <a:schemeClr val="lt1"/>
+          </a:fontRef>
+        </p:style>
+        <p:txBody>
+          <a:bodyPr rtlCol="0" anchor="ctr"/>
+          <a:lstStyle/>
+          <a:p>
+            <a:pPr algn="ctr"/>
+          </a:p>
+        </p:txBody>
+      </p:sp>
+      <p:sp>
+        <p:nvSpPr>
+          <p:cNvPr id="12" name="Rounded Rectangle 11"/>
+          <p:cNvSpPr/>
+          <p:nvPr/>
+        </p:nvSpPr>
+        <p:spPr>
+          <a:xfrm>
+            <a:off x="731519" y="1508760"/>
+            <a:ext cx="10728655" cy="32004"/>
+          </a:xfrm>
+          <a:prstGeom prst="roundRect">
+            <a:avLst>
+              <a:gd name="adj" fmla="val 50000"/>
+            </a:avLst>
+          </a:prstGeom>
+          <a:solidFill>
+            <a:srgbClr val="FFFFFF">
+              <a:alpha val="85000"/>
+            </a:srgbClr>
+          </a:solidFill>
+          <a:ln>
+            <a:noFill/>
+          </a:ln>
+          <a:effectLst/>
+        </p:spPr>
+        <p:style>
+          <a:lnRef idx="1">
+            <a:schemeClr val="accent1"/>
+          </a:lnRef>
+          <a:fillRef idx="3">
+            <a:schemeClr val="accent1"/>
+          </a:fillRef>
+          <a:effectRef idx="2">
+            <a:schemeClr val="accent1"/>
+          </a:effectRef>
+          <a:fontRef idx="minor">
+            <a:schemeClr val="lt1"/>
+          </a:fontRef>
+        </p:style>
+        <p:txBody>
+          <a:bodyPr rtlCol="0" anchor="ctr"/>
+          <a:lstStyle/>
+          <a:p>
+            <a:pPr algn="ctr"/>
+          </a:p>
+        </p:txBody>
+      </p:sp>
+      <p:sp>
+        <p:nvSpPr>
+          <p:cNvPr id="13" name="Rounded Rectangle 12"/>
+          <p:cNvSpPr/>
+          <p:nvPr/>
+        </p:nvSpPr>
+        <p:spPr>
+          <a:xfrm>
             <a:off x="1645919" y="2103120"/>
             <a:ext cx="8899855" cy="2377440"/>
           </a:xfrm>
@@ -8580,7 +9055,7 @@
       </p:sp>
       <p:sp>
         <p:nvSpPr>
-          <p:cNvPr id="12" name="Rounded Rectangle 11"/>
+          <p:cNvPr id="14" name="Rounded Rectangle 13"/>
           <p:cNvSpPr/>
           <p:nvPr/>
         </p:nvSpPr>
@@ -8628,7 +9103,7 @@
       </p:sp>
       <p:sp>
         <p:nvSpPr>
-          <p:cNvPr id="13" name="Rounded Rectangle 12"/>
+          <p:cNvPr id="15" name="Rounded Rectangle 14"/>
           <p:cNvSpPr/>
           <p:nvPr/>
         </p:nvSpPr>
@@ -8696,7 +9171,7 @@
       </p:sp>
       <p:sp>
         <p:nvSpPr>
-          <p:cNvPr id="14" name="TextBox 13"/>
+          <p:cNvPr id="16" name="TextBox 15"/>
           <p:cNvSpPr txBox="1"/>
           <p:nvPr/>
         </p:nvSpPr>
@@ -9116,14 +9591,177 @@
       </p:pic>
       <p:sp>
         <p:nvSpPr>
-          <p:cNvPr id="11" name="TextBox 10"/>
+          <p:cNvPr id="11" name="Rounded Rectangle 10"/>
+          <p:cNvSpPr/>
+          <p:nvPr/>
+        </p:nvSpPr>
+        <p:spPr>
+          <a:xfrm>
+            <a:off x="411479" y="1444752"/>
+            <a:ext cx="11368735" cy="4800600"/>
+          </a:xfrm>
+          <a:prstGeom prst="roundRect">
+            <a:avLst>
+              <a:gd name="adj" fmla="val 4000"/>
+            </a:avLst>
+          </a:prstGeom>
+          <a:solidFill>
+            <a:srgbClr val="FFFFFF">
+              <a:alpha val="84000"/>
+            </a:srgbClr>
+          </a:solidFill>
+          <a:ln w="19050">
+            <a:solidFill>
+              <a:srgbClr val="FFFFFF"/>
+            </a:solidFill>
+          </a:ln>
+          <a:effectLst>
+            <a:outerShdw blurRad="203200" dist="50800" dir="5400000" algn="t" rotWithShape="0">
+              <a:srgbClr val="1A2340">
+                <a:alpha val="20000"/>
+              </a:srgbClr>
+            </a:outerShdw>
+          </a:effectLst>
+        </p:spPr>
+        <p:style>
+          <a:lnRef idx="1">
+            <a:schemeClr val="accent1"/>
+          </a:lnRef>
+          <a:fillRef idx="3">
+            <a:schemeClr val="accent1"/>
+          </a:fillRef>
+          <a:effectRef idx="2">
+            <a:schemeClr val="accent1"/>
+          </a:effectRef>
+          <a:fontRef idx="minor">
+            <a:schemeClr val="lt1"/>
+          </a:fontRef>
+        </p:style>
+        <p:txBody>
+          <a:bodyPr rtlCol="0" anchor="ctr"/>
+          <a:lstStyle/>
+          <a:p>
+            <a:pPr algn="ctr"/>
+          </a:p>
+        </p:txBody>
+      </p:sp>
+      <p:sp>
+        <p:nvSpPr>
+          <p:cNvPr id="12" name="Rounded Rectangle 11"/>
+          <p:cNvSpPr/>
+          <p:nvPr/>
+        </p:nvSpPr>
+        <p:spPr>
+          <a:xfrm>
+            <a:off x="731519" y="1508760"/>
+            <a:ext cx="10728655" cy="32004"/>
+          </a:xfrm>
+          <a:prstGeom prst="roundRect">
+            <a:avLst>
+              <a:gd name="adj" fmla="val 50000"/>
+            </a:avLst>
+          </a:prstGeom>
+          <a:solidFill>
+            <a:srgbClr val="FFFFFF">
+              <a:alpha val="85000"/>
+            </a:srgbClr>
+          </a:solidFill>
+          <a:ln>
+            <a:noFill/>
+          </a:ln>
+          <a:effectLst/>
+        </p:spPr>
+        <p:style>
+          <a:lnRef idx="1">
+            <a:schemeClr val="accent1"/>
+          </a:lnRef>
+          <a:fillRef idx="3">
+            <a:schemeClr val="accent1"/>
+          </a:fillRef>
+          <a:effectRef idx="2">
+            <a:schemeClr val="accent1"/>
+          </a:effectRef>
+          <a:fontRef idx="minor">
+            <a:schemeClr val="lt1"/>
+          </a:fontRef>
+        </p:style>
+        <p:txBody>
+          <a:bodyPr rtlCol="0" anchor="ctr"/>
+          <a:lstStyle/>
+          <a:p>
+            <a:pPr algn="ctr"/>
+          </a:p>
+        </p:txBody>
+      </p:sp>
+      <p:sp>
+        <p:nvSpPr>
+          <p:cNvPr id="13" name="Rounded Rectangle 12"/>
+          <p:cNvSpPr/>
+          <p:nvPr/>
+        </p:nvSpPr>
+        <p:spPr>
+          <a:xfrm>
+            <a:off x="548640" y="1591056"/>
+            <a:ext cx="64008" cy="873252"/>
+          </a:xfrm>
+          <a:prstGeom prst="roundRect">
+            <a:avLst>
+              <a:gd name="adj" fmla="val 50000"/>
+            </a:avLst>
+          </a:prstGeom>
+          <a:solidFill>
+            <a:srgbClr val="8D6A2A"/>
+          </a:solidFill>
+          <a:ln>
+            <a:noFill/>
+          </a:ln>
+          <a:effectLst>
+            <a:outerShdw blurRad="203200" dist="50800" dir="5400000" algn="t" rotWithShape="0">
+              <a:srgbClr val="1A2340">
+                <a:alpha val="20000"/>
+              </a:srgbClr>
+            </a:outerShdw>
+          </a:effectLst>
+          <a:scene3d>
+            <a:camera prst="orthographicFront"/>
+            <a:lightRig rig="threePt" dir="t"/>
+          </a:scene3d>
+          <a:sp3d>
+            <a:bevelT w="44450" h="25400" prst="softRound"/>
+          </a:sp3d>
+        </p:spPr>
+        <p:style>
+          <a:lnRef idx="1">
+            <a:schemeClr val="accent1"/>
+          </a:lnRef>
+          <a:fillRef idx="3">
+            <a:schemeClr val="accent1"/>
+          </a:fillRef>
+          <a:effectRef idx="2">
+            <a:schemeClr val="accent1"/>
+          </a:effectRef>
+          <a:fontRef idx="minor">
+            <a:schemeClr val="lt1"/>
+          </a:fontRef>
+        </p:style>
+        <p:txBody>
+          <a:bodyPr rtlCol="0" anchor="ctr"/>
+          <a:lstStyle/>
+          <a:p>
+            <a:pPr algn="ctr"/>
+          </a:p>
+        </p:txBody>
+      </p:sp>
+      <p:sp>
+        <p:nvSpPr>
+          <p:cNvPr id="14" name="TextBox 13"/>
           <p:cNvSpPr txBox="1"/>
           <p:nvPr/>
         </p:nvSpPr>
         <p:spPr>
           <a:xfrm>
-            <a:off x="548640" y="1554480"/>
-            <a:ext cx="11094415" cy="1092708"/>
+            <a:off x="777240" y="1554480"/>
+            <a:ext cx="10865815" cy="1092708"/>
           </a:xfrm>
           <a:prstGeom prst="rect">
             <a:avLst/>
@@ -9173,7 +9811,7 @@
       </p:sp>
       <p:graphicFrame>
         <p:nvGraphicFramePr>
-          <p:cNvPr id="12" name="Table 11"/>
+          <p:cNvPr id="15" name="Table 14"/>
           <p:cNvGraphicFramePr>
             <a:graphicFrameLocks noGrp="1"/>
           </p:cNvGraphicFramePr>
@@ -10032,7 +10670,111 @@
       </p:pic>
       <p:sp>
         <p:nvSpPr>
-          <p:cNvPr id="11" name="Oval 10"/>
+          <p:cNvPr id="11" name="Rounded Rectangle 10"/>
+          <p:cNvSpPr/>
+          <p:nvPr/>
+        </p:nvSpPr>
+        <p:spPr>
+          <a:xfrm>
+            <a:off x="411479" y="1444752"/>
+            <a:ext cx="11368735" cy="4800600"/>
+          </a:xfrm>
+          <a:prstGeom prst="roundRect">
+            <a:avLst>
+              <a:gd name="adj" fmla="val 4000"/>
+            </a:avLst>
+          </a:prstGeom>
+          <a:solidFill>
+            <a:srgbClr val="FFFFFF">
+              <a:alpha val="84000"/>
+            </a:srgbClr>
+          </a:solidFill>
+          <a:ln w="19050">
+            <a:solidFill>
+              <a:srgbClr val="FFFFFF"/>
+            </a:solidFill>
+          </a:ln>
+          <a:effectLst>
+            <a:outerShdw blurRad="203200" dist="50800" dir="5400000" algn="t" rotWithShape="0">
+              <a:srgbClr val="1A2340">
+                <a:alpha val="20000"/>
+              </a:srgbClr>
+            </a:outerShdw>
+          </a:effectLst>
+        </p:spPr>
+        <p:style>
+          <a:lnRef idx="1">
+            <a:schemeClr val="accent1"/>
+          </a:lnRef>
+          <a:fillRef idx="3">
+            <a:schemeClr val="accent1"/>
+          </a:fillRef>
+          <a:effectRef idx="2">
+            <a:schemeClr val="accent1"/>
+          </a:effectRef>
+          <a:fontRef idx="minor">
+            <a:schemeClr val="lt1"/>
+          </a:fontRef>
+        </p:style>
+        <p:txBody>
+          <a:bodyPr rtlCol="0" anchor="ctr"/>
+          <a:lstStyle/>
+          <a:p>
+            <a:pPr algn="ctr"/>
+          </a:p>
+        </p:txBody>
+      </p:sp>
+      <p:sp>
+        <p:nvSpPr>
+          <p:cNvPr id="12" name="Rounded Rectangle 11"/>
+          <p:cNvSpPr/>
+          <p:nvPr/>
+        </p:nvSpPr>
+        <p:spPr>
+          <a:xfrm>
+            <a:off x="731519" y="1508760"/>
+            <a:ext cx="10728655" cy="32004"/>
+          </a:xfrm>
+          <a:prstGeom prst="roundRect">
+            <a:avLst>
+              <a:gd name="adj" fmla="val 50000"/>
+            </a:avLst>
+          </a:prstGeom>
+          <a:solidFill>
+            <a:srgbClr val="FFFFFF">
+              <a:alpha val="85000"/>
+            </a:srgbClr>
+          </a:solidFill>
+          <a:ln>
+            <a:noFill/>
+          </a:ln>
+          <a:effectLst/>
+        </p:spPr>
+        <p:style>
+          <a:lnRef idx="1">
+            <a:schemeClr val="accent1"/>
+          </a:lnRef>
+          <a:fillRef idx="3">
+            <a:schemeClr val="accent1"/>
+          </a:fillRef>
+          <a:effectRef idx="2">
+            <a:schemeClr val="accent1"/>
+          </a:effectRef>
+          <a:fontRef idx="minor">
+            <a:schemeClr val="lt1"/>
+          </a:fontRef>
+        </p:style>
+        <p:txBody>
+          <a:bodyPr rtlCol="0" anchor="ctr"/>
+          <a:lstStyle/>
+          <a:p>
+            <a:pPr algn="ctr"/>
+          </a:p>
+        </p:txBody>
+      </p:sp>
+      <p:sp>
+        <p:nvSpPr>
+          <p:cNvPr id="13" name="Oval 12"/>
           <p:cNvSpPr/>
           <p:nvPr/>
         </p:nvSpPr>
@@ -10085,7 +10827,7 @@
       </p:sp>
       <p:sp>
         <p:nvSpPr>
-          <p:cNvPr id="12" name="TextBox 11"/>
+          <p:cNvPr id="14" name="TextBox 13"/>
           <p:cNvSpPr txBox="1"/>
           <p:nvPr/>
         </p:nvSpPr>
@@ -10506,6 +11248,110 @@
         </p:nvSpPr>
         <p:spPr>
           <a:xfrm>
+            <a:off x="411479" y="1444752"/>
+            <a:ext cx="11368735" cy="4800600"/>
+          </a:xfrm>
+          <a:prstGeom prst="roundRect">
+            <a:avLst>
+              <a:gd name="adj" fmla="val 4000"/>
+            </a:avLst>
+          </a:prstGeom>
+          <a:solidFill>
+            <a:srgbClr val="FFFFFF">
+              <a:alpha val="84000"/>
+            </a:srgbClr>
+          </a:solidFill>
+          <a:ln w="19050">
+            <a:solidFill>
+              <a:srgbClr val="FFFFFF"/>
+            </a:solidFill>
+          </a:ln>
+          <a:effectLst>
+            <a:outerShdw blurRad="203200" dist="50800" dir="5400000" algn="t" rotWithShape="0">
+              <a:srgbClr val="1A2340">
+                <a:alpha val="20000"/>
+              </a:srgbClr>
+            </a:outerShdw>
+          </a:effectLst>
+        </p:spPr>
+        <p:style>
+          <a:lnRef idx="1">
+            <a:schemeClr val="accent1"/>
+          </a:lnRef>
+          <a:fillRef idx="3">
+            <a:schemeClr val="accent1"/>
+          </a:fillRef>
+          <a:effectRef idx="2">
+            <a:schemeClr val="accent1"/>
+          </a:effectRef>
+          <a:fontRef idx="minor">
+            <a:schemeClr val="lt1"/>
+          </a:fontRef>
+        </p:style>
+        <p:txBody>
+          <a:bodyPr rtlCol="0" anchor="ctr"/>
+          <a:lstStyle/>
+          <a:p>
+            <a:pPr algn="ctr"/>
+          </a:p>
+        </p:txBody>
+      </p:sp>
+      <p:sp>
+        <p:nvSpPr>
+          <p:cNvPr id="12" name="Rounded Rectangle 11"/>
+          <p:cNvSpPr/>
+          <p:nvPr/>
+        </p:nvSpPr>
+        <p:spPr>
+          <a:xfrm>
+            <a:off x="731519" y="1508760"/>
+            <a:ext cx="10728655" cy="32004"/>
+          </a:xfrm>
+          <a:prstGeom prst="roundRect">
+            <a:avLst>
+              <a:gd name="adj" fmla="val 50000"/>
+            </a:avLst>
+          </a:prstGeom>
+          <a:solidFill>
+            <a:srgbClr val="FFFFFF">
+              <a:alpha val="85000"/>
+            </a:srgbClr>
+          </a:solidFill>
+          <a:ln>
+            <a:noFill/>
+          </a:ln>
+          <a:effectLst/>
+        </p:spPr>
+        <p:style>
+          <a:lnRef idx="1">
+            <a:schemeClr val="accent1"/>
+          </a:lnRef>
+          <a:fillRef idx="3">
+            <a:schemeClr val="accent1"/>
+          </a:fillRef>
+          <a:effectRef idx="2">
+            <a:schemeClr val="accent1"/>
+          </a:effectRef>
+          <a:fontRef idx="minor">
+            <a:schemeClr val="lt1"/>
+          </a:fontRef>
+        </p:style>
+        <p:txBody>
+          <a:bodyPr rtlCol="0" anchor="ctr"/>
+          <a:lstStyle/>
+          <a:p>
+            <a:pPr algn="ctr"/>
+          </a:p>
+        </p:txBody>
+      </p:sp>
+      <p:sp>
+        <p:nvSpPr>
+          <p:cNvPr id="13" name="Rounded Rectangle 12"/>
+          <p:cNvSpPr/>
+          <p:nvPr/>
+        </p:nvSpPr>
+        <p:spPr>
+          <a:xfrm>
             <a:off x="1645919" y="1554480"/>
             <a:ext cx="8899855" cy="4617720"/>
           </a:xfrm>
@@ -10556,7 +11402,7 @@
       </p:sp>
       <p:sp>
         <p:nvSpPr>
-          <p:cNvPr id="12" name="Rounded Rectangle 11"/>
+          <p:cNvPr id="14" name="Rounded Rectangle 13"/>
           <p:cNvSpPr/>
           <p:nvPr/>
         </p:nvSpPr>
@@ -10604,7 +11450,7 @@
       </p:sp>
       <p:sp>
         <p:nvSpPr>
-          <p:cNvPr id="13" name="Rounded Rectangle 12"/>
+          <p:cNvPr id="15" name="Rounded Rectangle 14"/>
           <p:cNvSpPr/>
           <p:nvPr/>
         </p:nvSpPr>
@@ -10672,7 +11518,7 @@
       </p:sp>
       <p:sp>
         <p:nvSpPr>
-          <p:cNvPr id="14" name="TextBox 13"/>
+          <p:cNvPr id="16" name="TextBox 15"/>
           <p:cNvSpPr txBox="1"/>
           <p:nvPr/>
         </p:nvSpPr>
@@ -11226,9 +12072,113 @@
           </a:prstGeom>
         </p:spPr>
       </p:pic>
+      <p:sp>
+        <p:nvSpPr>
+          <p:cNvPr id="11" name="Rounded Rectangle 10"/>
+          <p:cNvSpPr/>
+          <p:nvPr/>
+        </p:nvSpPr>
+        <p:spPr>
+          <a:xfrm>
+            <a:off x="411479" y="1444752"/>
+            <a:ext cx="11368735" cy="4800600"/>
+          </a:xfrm>
+          <a:prstGeom prst="roundRect">
+            <a:avLst>
+              <a:gd name="adj" fmla="val 4000"/>
+            </a:avLst>
+          </a:prstGeom>
+          <a:solidFill>
+            <a:srgbClr val="FFFFFF">
+              <a:alpha val="84000"/>
+            </a:srgbClr>
+          </a:solidFill>
+          <a:ln w="19050">
+            <a:solidFill>
+              <a:srgbClr val="FFFFFF"/>
+            </a:solidFill>
+          </a:ln>
+          <a:effectLst>
+            <a:outerShdw blurRad="203200" dist="50800" dir="5400000" algn="t" rotWithShape="0">
+              <a:srgbClr val="1A2340">
+                <a:alpha val="20000"/>
+              </a:srgbClr>
+            </a:outerShdw>
+          </a:effectLst>
+        </p:spPr>
+        <p:style>
+          <a:lnRef idx="1">
+            <a:schemeClr val="accent1"/>
+          </a:lnRef>
+          <a:fillRef idx="3">
+            <a:schemeClr val="accent1"/>
+          </a:fillRef>
+          <a:effectRef idx="2">
+            <a:schemeClr val="accent1"/>
+          </a:effectRef>
+          <a:fontRef idx="minor">
+            <a:schemeClr val="lt1"/>
+          </a:fontRef>
+        </p:style>
+        <p:txBody>
+          <a:bodyPr rtlCol="0" anchor="ctr"/>
+          <a:lstStyle/>
+          <a:p>
+            <a:pPr algn="ctr"/>
+          </a:p>
+        </p:txBody>
+      </p:sp>
+      <p:sp>
+        <p:nvSpPr>
+          <p:cNvPr id="12" name="Rounded Rectangle 11"/>
+          <p:cNvSpPr/>
+          <p:nvPr/>
+        </p:nvSpPr>
+        <p:spPr>
+          <a:xfrm>
+            <a:off x="731519" y="1508760"/>
+            <a:ext cx="10728655" cy="32004"/>
+          </a:xfrm>
+          <a:prstGeom prst="roundRect">
+            <a:avLst>
+              <a:gd name="adj" fmla="val 50000"/>
+            </a:avLst>
+          </a:prstGeom>
+          <a:solidFill>
+            <a:srgbClr val="FFFFFF">
+              <a:alpha val="85000"/>
+            </a:srgbClr>
+          </a:solidFill>
+          <a:ln>
+            <a:noFill/>
+          </a:ln>
+          <a:effectLst/>
+        </p:spPr>
+        <p:style>
+          <a:lnRef idx="1">
+            <a:schemeClr val="accent1"/>
+          </a:lnRef>
+          <a:fillRef idx="3">
+            <a:schemeClr val="accent1"/>
+          </a:fillRef>
+          <a:effectRef idx="2">
+            <a:schemeClr val="accent1"/>
+          </a:effectRef>
+          <a:fontRef idx="minor">
+            <a:schemeClr val="lt1"/>
+          </a:fontRef>
+        </p:style>
+        <p:txBody>
+          <a:bodyPr rtlCol="0" anchor="ctr"/>
+          <a:lstStyle/>
+          <a:p>
+            <a:pPr algn="ctr"/>
+          </a:p>
+        </p:txBody>
+      </p:sp>
       <p:graphicFrame>
         <p:nvGraphicFramePr>
-          <p:cNvPr id="11" name="Table 10"/>
+          <p:cNvPr id="13" name="Table 12"/>
           <p:cNvGraphicFramePr>
             <a:graphicFrameLocks noGrp="1"/>
           </p:cNvGraphicFramePr>
@@ -12044,7 +12994,111 @@
       </p:pic>
       <p:sp>
         <p:nvSpPr>
-          <p:cNvPr id="11" name="Oval 10"/>
+          <p:cNvPr id="11" name="Rounded Rectangle 10"/>
+          <p:cNvSpPr/>
+          <p:nvPr/>
+        </p:nvSpPr>
+        <p:spPr>
+          <a:xfrm>
+            <a:off x="411479" y="1444752"/>
+            <a:ext cx="11368735" cy="4800600"/>
+          </a:xfrm>
+          <a:prstGeom prst="roundRect">
+            <a:avLst>
+              <a:gd name="adj" fmla="val 4000"/>
+            </a:avLst>
+          </a:prstGeom>
+          <a:solidFill>
+            <a:srgbClr val="FFFFFF">
+              <a:alpha val="84000"/>
+            </a:srgbClr>
+          </a:solidFill>
+          <a:ln w="19050">
+            <a:solidFill>
+              <a:srgbClr val="FFFFFF"/>
+            </a:solidFill>
+          </a:ln>
+          <a:effectLst>
+            <a:outerShdw blurRad="203200" dist="50800" dir="5400000" algn="t" rotWithShape="0">
+              <a:srgbClr val="1A2340">
+                <a:alpha val="20000"/>
+              </a:srgbClr>
+            </a:outerShdw>
+          </a:effectLst>
+        </p:spPr>
+        <p:style>
+          <a:lnRef idx="1">
+            <a:schemeClr val="accent1"/>
+          </a:lnRef>
+          <a:fillRef idx="3">
+            <a:schemeClr val="accent1"/>
+          </a:fillRef>
+          <a:effectRef idx="2">
+            <a:schemeClr val="accent1"/>
+          </a:effectRef>
+          <a:fontRef idx="minor">
+            <a:schemeClr val="lt1"/>
+          </a:fontRef>
+        </p:style>
+        <p:txBody>
+          <a:bodyPr rtlCol="0" anchor="ctr"/>
+          <a:lstStyle/>
+          <a:p>
+            <a:pPr algn="ctr"/>
+          </a:p>
+        </p:txBody>
+      </p:sp>
+      <p:sp>
+        <p:nvSpPr>
+          <p:cNvPr id="12" name="Rounded Rectangle 11"/>
+          <p:cNvSpPr/>
+          <p:nvPr/>
+        </p:nvSpPr>
+        <p:spPr>
+          <a:xfrm>
+            <a:off x="731519" y="1508760"/>
+            <a:ext cx="10728655" cy="32004"/>
+          </a:xfrm>
+          <a:prstGeom prst="roundRect">
+            <a:avLst>
+              <a:gd name="adj" fmla="val 50000"/>
+            </a:avLst>
+          </a:prstGeom>
+          <a:solidFill>
+            <a:srgbClr val="FFFFFF">
+              <a:alpha val="85000"/>
+            </a:srgbClr>
+          </a:solidFill>
+          <a:ln>
+            <a:noFill/>
+          </a:ln>
+          <a:effectLst/>
+        </p:spPr>
+        <p:style>
+          <a:lnRef idx="1">
+            <a:schemeClr val="accent1"/>
+          </a:lnRef>
+          <a:fillRef idx="3">
+            <a:schemeClr val="accent1"/>
+          </a:fillRef>
+          <a:effectRef idx="2">
+            <a:schemeClr val="accent1"/>
+          </a:effectRef>
+          <a:fontRef idx="minor">
+            <a:schemeClr val="lt1"/>
+          </a:fontRef>
+        </p:style>
+        <p:txBody>
+          <a:bodyPr rtlCol="0" anchor="ctr"/>
+          <a:lstStyle/>
+          <a:p>
+            <a:pPr algn="ctr"/>
+          </a:p>
+        </p:txBody>
+      </p:sp>
+      <p:sp>
+        <p:nvSpPr>
+          <p:cNvPr id="13" name="Oval 12"/>
           <p:cNvSpPr/>
           <p:nvPr/>
         </p:nvSpPr>
@@ -12097,7 +13151,7 @@
       </p:sp>
       <p:sp>
         <p:nvSpPr>
-          <p:cNvPr id="12" name="TextBox 11"/>
+          <p:cNvPr id="14" name="TextBox 13"/>
           <p:cNvSpPr txBox="1"/>
           <p:nvPr/>
         </p:nvSpPr>
@@ -12131,7 +13185,7 @@
       </p:sp>
       <p:sp>
         <p:nvSpPr>
-          <p:cNvPr id="13" name="Oval 12"/>
+          <p:cNvPr id="15" name="Oval 14"/>
           <p:cNvSpPr/>
           <p:nvPr/>
         </p:nvSpPr>
@@ -12184,7 +13238,7 @@
       </p:sp>
       <p:sp>
         <p:nvSpPr>
-          <p:cNvPr id="14" name="TextBox 13"/>
+          <p:cNvPr id="16" name="TextBox 15"/>
           <p:cNvSpPr txBox="1"/>
           <p:nvPr/>
         </p:nvSpPr>
@@ -12218,7 +13272,7 @@
       </p:sp>
       <p:sp>
         <p:nvSpPr>
-          <p:cNvPr id="15" name="Oval 14"/>
+          <p:cNvPr id="17" name="Oval 16"/>
           <p:cNvSpPr/>
           <p:nvPr/>
         </p:nvSpPr>
@@ -12271,7 +13325,7 @@
       </p:sp>
       <p:sp>
         <p:nvSpPr>
-          <p:cNvPr id="16" name="TextBox 15"/>
+          <p:cNvPr id="18" name="TextBox 17"/>
           <p:cNvSpPr txBox="1"/>
           <p:nvPr/>
         </p:nvSpPr>
@@ -12686,7 +13740,111 @@
       </p:pic>
       <p:sp>
         <p:nvSpPr>
-          <p:cNvPr id="11" name="TextBox 10"/>
+          <p:cNvPr id="11" name="Rounded Rectangle 10"/>
+          <p:cNvSpPr/>
+          <p:nvPr/>
+        </p:nvSpPr>
+        <p:spPr>
+          <a:xfrm>
+            <a:off x="411479" y="1444752"/>
+            <a:ext cx="11368735" cy="4800600"/>
+          </a:xfrm>
+          <a:prstGeom prst="roundRect">
+            <a:avLst>
+              <a:gd name="adj" fmla="val 4000"/>
+            </a:avLst>
+          </a:prstGeom>
+          <a:solidFill>
+            <a:srgbClr val="FFFFFF">
+              <a:alpha val="84000"/>
+            </a:srgbClr>
+          </a:solidFill>
+          <a:ln w="19050">
+            <a:solidFill>
+              <a:srgbClr val="FFFFFF"/>
+            </a:solidFill>
+          </a:ln>
+          <a:effectLst>
+            <a:outerShdw blurRad="203200" dist="50800" dir="5400000" algn="t" rotWithShape="0">
+              <a:srgbClr val="1A2340">
+                <a:alpha val="20000"/>
+              </a:srgbClr>
+            </a:outerShdw>
+          </a:effectLst>
+        </p:spPr>
+        <p:style>
+          <a:lnRef idx="1">
+            <a:schemeClr val="accent1"/>
+          </a:lnRef>
+          <a:fillRef idx="3">
+            <a:schemeClr val="accent1"/>
+          </a:fillRef>
+          <a:effectRef idx="2">
+            <a:schemeClr val="accent1"/>
+          </a:effectRef>
+          <a:fontRef idx="minor">
+            <a:schemeClr val="lt1"/>
+          </a:fontRef>
+        </p:style>
+        <p:txBody>
+          <a:bodyPr rtlCol="0" anchor="ctr"/>
+          <a:lstStyle/>
+          <a:p>
+            <a:pPr algn="ctr"/>
+          </a:p>
+        </p:txBody>
+      </p:sp>
+      <p:sp>
+        <p:nvSpPr>
+          <p:cNvPr id="12" name="Rounded Rectangle 11"/>
+          <p:cNvSpPr/>
+          <p:nvPr/>
+        </p:nvSpPr>
+        <p:spPr>
+          <a:xfrm>
+            <a:off x="731519" y="1508760"/>
+            <a:ext cx="10728655" cy="32004"/>
+          </a:xfrm>
+          <a:prstGeom prst="roundRect">
+            <a:avLst>
+              <a:gd name="adj" fmla="val 50000"/>
+            </a:avLst>
+          </a:prstGeom>
+          <a:solidFill>
+            <a:srgbClr val="FFFFFF">
+              <a:alpha val="85000"/>
+            </a:srgbClr>
+          </a:solidFill>
+          <a:ln>
+            <a:noFill/>
+          </a:ln>
+          <a:effectLst/>
+        </p:spPr>
+        <p:style>
+          <a:lnRef idx="1">
+            <a:schemeClr val="accent1"/>
+          </a:lnRef>
+          <a:fillRef idx="3">
+            <a:schemeClr val="accent1"/>
+          </a:fillRef>
+          <a:effectRef idx="2">
+            <a:schemeClr val="accent1"/>
+          </a:effectRef>
+          <a:fontRef idx="minor">
+            <a:schemeClr val="lt1"/>
+          </a:fontRef>
+        </p:style>
+        <p:txBody>
+          <a:bodyPr rtlCol="0" anchor="ctr"/>
+          <a:lstStyle/>
+          <a:p>
+            <a:pPr algn="ctr"/>
+          </a:p>
+        </p:txBody>
+      </p:sp>
+      <p:sp>
+        <p:nvSpPr>
+          <p:cNvPr id="13" name="TextBox 12"/>
           <p:cNvSpPr txBox="1"/>
           <p:nvPr/>
         </p:nvSpPr>
@@ -12720,7 +13878,7 @@
       </p:sp>
       <p:sp>
         <p:nvSpPr>
-          <p:cNvPr id="12" name="Rounded Rectangle 11"/>
+          <p:cNvPr id="14" name="Rounded Rectangle 13"/>
           <p:cNvSpPr/>
           <p:nvPr/>
         </p:nvSpPr>
@@ -12776,7 +13934,7 @@
       </p:sp>
       <p:sp>
         <p:nvSpPr>
-          <p:cNvPr id="13" name="Oval 12"/>
+          <p:cNvPr id="15" name="Oval 14"/>
           <p:cNvSpPr/>
           <p:nvPr/>
         </p:nvSpPr>
@@ -12829,7 +13987,7 @@
       </p:sp>
       <p:sp>
         <p:nvSpPr>
-          <p:cNvPr id="14" name="TextBox 13"/>
+          <p:cNvPr id="16" name="TextBox 15"/>
           <p:cNvSpPr txBox="1"/>
           <p:nvPr/>
         </p:nvSpPr>
@@ -12863,7 +14021,7 @@
       </p:sp>
       <p:sp>
         <p:nvSpPr>
-          <p:cNvPr id="15" name="Rounded Rectangle 14"/>
+          <p:cNvPr id="17" name="Rounded Rectangle 16"/>
           <p:cNvSpPr/>
           <p:nvPr/>
         </p:nvSpPr>
@@ -12919,7 +14077,7 @@
       </p:sp>
       <p:sp>
         <p:nvSpPr>
-          <p:cNvPr id="16" name="Oval 15"/>
+          <p:cNvPr id="18" name="Oval 17"/>
           <p:cNvSpPr/>
           <p:nvPr/>
         </p:nvSpPr>
@@ -12972,7 +14130,7 @@
       </p:sp>
       <p:sp>
         <p:nvSpPr>
-          <p:cNvPr id="17" name="TextBox 16"/>
+          <p:cNvPr id="19" name="TextBox 18"/>
           <p:cNvSpPr txBox="1"/>
           <p:nvPr/>
         </p:nvSpPr>
@@ -13006,7 +14164,7 @@
       </p:sp>
       <p:sp>
         <p:nvSpPr>
-          <p:cNvPr id="18" name="Rounded Rectangle 17"/>
+          <p:cNvPr id="20" name="Rounded Rectangle 19"/>
           <p:cNvSpPr/>
           <p:nvPr/>
         </p:nvSpPr>
@@ -13062,7 +14220,7 @@
       </p:sp>
       <p:sp>
         <p:nvSpPr>
-          <p:cNvPr id="19" name="Oval 18"/>
+          <p:cNvPr id="21" name="Oval 20"/>
           <p:cNvSpPr/>
           <p:nvPr/>
         </p:nvSpPr>
@@ -13115,7 +14273,7 @@
       </p:sp>
       <p:sp>
         <p:nvSpPr>
-          <p:cNvPr id="20" name="TextBox 19"/>
+          <p:cNvPr id="22" name="TextBox 21"/>
           <p:cNvSpPr txBox="1"/>
           <p:nvPr/>
         </p:nvSpPr>
@@ -13149,7 +14307,7 @@
       </p:sp>
       <p:sp>
         <p:nvSpPr>
-          <p:cNvPr id="21" name="Rounded Rectangle 20"/>
+          <p:cNvPr id="23" name="Rounded Rectangle 22"/>
           <p:cNvSpPr/>
           <p:nvPr/>
         </p:nvSpPr>
@@ -13205,7 +14363,7 @@
       </p:sp>
       <p:sp>
         <p:nvSpPr>
-          <p:cNvPr id="22" name="Oval 21"/>
+          <p:cNvPr id="24" name="Oval 23"/>
           <p:cNvSpPr/>
           <p:nvPr/>
         </p:nvSpPr>
@@ -13258,7 +14416,7 @@
       </p:sp>
       <p:sp>
         <p:nvSpPr>
-          <p:cNvPr id="23" name="TextBox 22"/>
+          <p:cNvPr id="25" name="TextBox 24"/>
           <p:cNvSpPr txBox="1"/>
           <p:nvPr/>
         </p:nvSpPr>
@@ -13673,7 +14831,111 @@
       </p:pic>
       <p:sp>
         <p:nvSpPr>
-          <p:cNvPr id="11" name="Oval 10"/>
+          <p:cNvPr id="11" name="Rounded Rectangle 10"/>
+          <p:cNvSpPr/>
+          <p:nvPr/>
+        </p:nvSpPr>
+        <p:spPr>
+          <a:xfrm>
+            <a:off x="411479" y="1444752"/>
+            <a:ext cx="11368735" cy="4800600"/>
+          </a:xfrm>
+          <a:prstGeom prst="roundRect">
+            <a:avLst>
+              <a:gd name="adj" fmla="val 4000"/>
+            </a:avLst>
+          </a:prstGeom>
+          <a:solidFill>
+            <a:srgbClr val="FFFFFF">
+              <a:alpha val="84000"/>
+            </a:srgbClr>
+          </a:solidFill>
+          <a:ln w="19050">
+            <a:solidFill>
+              <a:srgbClr val="FFFFFF"/>
+            </a:solidFill>
+          </a:ln>
+          <a:effectLst>
+            <a:outerShdw blurRad="203200" dist="50800" dir="5400000" algn="t" rotWithShape="0">
+              <a:srgbClr val="1A2340">
+                <a:alpha val="20000"/>
+              </a:srgbClr>
+            </a:outerShdw>
+          </a:effectLst>
+        </p:spPr>
+        <p:style>
+          <a:lnRef idx="1">
+            <a:schemeClr val="accent1"/>
+          </a:lnRef>
+          <a:fillRef idx="3">
+            <a:schemeClr val="accent1"/>
+          </a:fillRef>
+          <a:effectRef idx="2">
+            <a:schemeClr val="accent1"/>
+          </a:effectRef>
+          <a:fontRef idx="minor">
+            <a:schemeClr val="lt1"/>
+          </a:fontRef>
+        </p:style>
+        <p:txBody>
+          <a:bodyPr rtlCol="0" anchor="ctr"/>
+          <a:lstStyle/>
+          <a:p>
+            <a:pPr algn="ctr"/>
+          </a:p>
+        </p:txBody>
+      </p:sp>
+      <p:sp>
+        <p:nvSpPr>
+          <p:cNvPr id="12" name="Rounded Rectangle 11"/>
+          <p:cNvSpPr/>
+          <p:nvPr/>
+        </p:nvSpPr>
+        <p:spPr>
+          <a:xfrm>
+            <a:off x="731519" y="1508760"/>
+            <a:ext cx="10728655" cy="32004"/>
+          </a:xfrm>
+          <a:prstGeom prst="roundRect">
+            <a:avLst>
+              <a:gd name="adj" fmla="val 50000"/>
+            </a:avLst>
+          </a:prstGeom>
+          <a:solidFill>
+            <a:srgbClr val="FFFFFF">
+              <a:alpha val="85000"/>
+            </a:srgbClr>
+          </a:solidFill>
+          <a:ln>
+            <a:noFill/>
+          </a:ln>
+          <a:effectLst/>
+        </p:spPr>
+        <p:style>
+          <a:lnRef idx="1">
+            <a:schemeClr val="accent1"/>
+          </a:lnRef>
+          <a:fillRef idx="3">
+            <a:schemeClr val="accent1"/>
+          </a:fillRef>
+          <a:effectRef idx="2">
+            <a:schemeClr val="accent1"/>
+          </a:effectRef>
+          <a:fontRef idx="minor">
+            <a:schemeClr val="lt1"/>
+          </a:fontRef>
+        </p:style>
+        <p:txBody>
+          <a:bodyPr rtlCol="0" anchor="ctr"/>
+          <a:lstStyle/>
+          <a:p>
+            <a:pPr algn="ctr"/>
+          </a:p>
+        </p:txBody>
+      </p:sp>
+      <p:sp>
+        <p:nvSpPr>
+          <p:cNvPr id="13" name="Oval 12"/>
           <p:cNvSpPr/>
           <p:nvPr/>
         </p:nvSpPr>
@@ -13726,7 +14988,7 @@
       </p:sp>
       <p:sp>
         <p:nvSpPr>
-          <p:cNvPr id="12" name="TextBox 11"/>
+          <p:cNvPr id="14" name="TextBox 13"/>
           <p:cNvSpPr txBox="1"/>
           <p:nvPr/>
         </p:nvSpPr>
@@ -13760,7 +15022,7 @@
       </p:sp>
       <p:sp>
         <p:nvSpPr>
-          <p:cNvPr id="13" name="Oval 12"/>
+          <p:cNvPr id="15" name="Oval 14"/>
           <p:cNvSpPr/>
           <p:nvPr/>
         </p:nvSpPr>
@@ -13813,7 +15075,7 @@
       </p:sp>
       <p:sp>
         <p:nvSpPr>
-          <p:cNvPr id="14" name="TextBox 13"/>
+          <p:cNvPr id="16" name="TextBox 15"/>
           <p:cNvSpPr txBox="1"/>
           <p:nvPr/>
         </p:nvSpPr>
@@ -13847,7 +15109,7 @@
       </p:sp>
       <p:sp>
         <p:nvSpPr>
-          <p:cNvPr id="15" name="Oval 14"/>
+          <p:cNvPr id="17" name="Oval 16"/>
           <p:cNvSpPr/>
           <p:nvPr/>
         </p:nvSpPr>
@@ -13900,7 +15162,7 @@
       </p:sp>
       <p:sp>
         <p:nvSpPr>
-          <p:cNvPr id="16" name="TextBox 15"/>
+          <p:cNvPr id="18" name="TextBox 17"/>
           <p:cNvSpPr txBox="1"/>
           <p:nvPr/>
         </p:nvSpPr>
@@ -13934,7 +15196,7 @@
       </p:sp>
       <p:sp>
         <p:nvSpPr>
-          <p:cNvPr id="17" name="Oval 16"/>
+          <p:cNvPr id="19" name="Oval 18"/>
           <p:cNvSpPr/>
           <p:nvPr/>
         </p:nvSpPr>
@@ -13987,7 +15249,7 @@
       </p:sp>
       <p:sp>
         <p:nvSpPr>
-          <p:cNvPr id="18" name="TextBox 17"/>
+          <p:cNvPr id="20" name="TextBox 19"/>
           <p:cNvSpPr txBox="1"/>
           <p:nvPr/>
         </p:nvSpPr>
@@ -14021,7 +15283,7 @@
       </p:sp>
       <p:sp>
         <p:nvSpPr>
-          <p:cNvPr id="19" name="Oval 18"/>
+          <p:cNvPr id="21" name="Oval 20"/>
           <p:cNvSpPr/>
           <p:nvPr/>
         </p:nvSpPr>
@@ -14074,7 +15336,7 @@
       </p:sp>
       <p:sp>
         <p:nvSpPr>
-          <p:cNvPr id="20" name="TextBox 19"/>
+          <p:cNvPr id="22" name="TextBox 21"/>
           <p:cNvSpPr txBox="1"/>
           <p:nvPr/>
         </p:nvSpPr>
@@ -14108,7 +15370,7 @@
       </p:sp>
       <p:sp>
         <p:nvSpPr>
-          <p:cNvPr id="21" name="Rounded Rectangle 20"/>
+          <p:cNvPr id="23" name="Rounded Rectangle 22"/>
           <p:cNvSpPr/>
           <p:nvPr/>
         </p:nvSpPr>
@@ -14164,7 +15426,7 @@
       </p:sp>
       <p:sp>
         <p:nvSpPr>
-          <p:cNvPr id="22" name="Rounded Rectangle 21"/>
+          <p:cNvPr id="24" name="Rounded Rectangle 23"/>
           <p:cNvSpPr/>
           <p:nvPr/>
         </p:nvSpPr>
@@ -14212,7 +15474,7 @@
       </p:sp>
       <p:sp>
         <p:nvSpPr>
-          <p:cNvPr id="23" name="TextBox 22"/>
+          <p:cNvPr id="25" name="TextBox 24"/>
           <p:cNvSpPr txBox="1"/>
           <p:nvPr/>
         </p:nvSpPr>
@@ -14670,7 +15932,111 @@
       </p:pic>
       <p:sp>
         <p:nvSpPr>
-          <p:cNvPr id="11" name="TextBox 10"/>
+          <p:cNvPr id="11" name="Rounded Rectangle 10"/>
+          <p:cNvSpPr/>
+          <p:nvPr/>
+        </p:nvSpPr>
+        <p:spPr>
+          <a:xfrm>
+            <a:off x="411479" y="1444752"/>
+            <a:ext cx="11368735" cy="4800600"/>
+          </a:xfrm>
+          <a:prstGeom prst="roundRect">
+            <a:avLst>
+              <a:gd name="adj" fmla="val 4000"/>
+            </a:avLst>
+          </a:prstGeom>
+          <a:solidFill>
+            <a:srgbClr val="FFFFFF">
+              <a:alpha val="84000"/>
+            </a:srgbClr>
+          </a:solidFill>
+          <a:ln w="19050">
+            <a:solidFill>
+              <a:srgbClr val="FFFFFF"/>
+            </a:solidFill>
+          </a:ln>
+          <a:effectLst>
+            <a:outerShdw blurRad="203200" dist="50800" dir="5400000" algn="t" rotWithShape="0">
+              <a:srgbClr val="1A2340">
+                <a:alpha val="20000"/>
+              </a:srgbClr>
+            </a:outerShdw>
+          </a:effectLst>
+        </p:spPr>
+        <p:style>
+          <a:lnRef idx="1">
+            <a:schemeClr val="accent1"/>
+          </a:lnRef>
+          <a:fillRef idx="3">
+            <a:schemeClr val="accent1"/>
+          </a:fillRef>
+          <a:effectRef idx="2">
+            <a:schemeClr val="accent1"/>
+          </a:effectRef>
+          <a:fontRef idx="minor">
+            <a:schemeClr val="lt1"/>
+          </a:fontRef>
+        </p:style>
+        <p:txBody>
+          <a:bodyPr rtlCol="0" anchor="ctr"/>
+          <a:lstStyle/>
+          <a:p>
+            <a:pPr algn="ctr"/>
+          </a:p>
+        </p:txBody>
+      </p:sp>
+      <p:sp>
+        <p:nvSpPr>
+          <p:cNvPr id="12" name="Rounded Rectangle 11"/>
+          <p:cNvSpPr/>
+          <p:nvPr/>
+        </p:nvSpPr>
+        <p:spPr>
+          <a:xfrm>
+            <a:off x="731519" y="1508760"/>
+            <a:ext cx="10728655" cy="32004"/>
+          </a:xfrm>
+          <a:prstGeom prst="roundRect">
+            <a:avLst>
+              <a:gd name="adj" fmla="val 50000"/>
+            </a:avLst>
+          </a:prstGeom>
+          <a:solidFill>
+            <a:srgbClr val="FFFFFF">
+              <a:alpha val="85000"/>
+            </a:srgbClr>
+          </a:solidFill>
+          <a:ln>
+            <a:noFill/>
+          </a:ln>
+          <a:effectLst/>
+        </p:spPr>
+        <p:style>
+          <a:lnRef idx="1">
+            <a:schemeClr val="accent1"/>
+          </a:lnRef>
+          <a:fillRef idx="3">
+            <a:schemeClr val="accent1"/>
+          </a:fillRef>
+          <a:effectRef idx="2">
+            <a:schemeClr val="accent1"/>
+          </a:effectRef>
+          <a:fontRef idx="minor">
+            <a:schemeClr val="lt1"/>
+          </a:fontRef>
+        </p:style>
+        <p:txBody>
+          <a:bodyPr rtlCol="0" anchor="ctr"/>
+          <a:lstStyle/>
+          <a:p>
+            <a:pPr algn="ctr"/>
+          </a:p>
+        </p:txBody>
+      </p:sp>
+      <p:sp>
+        <p:nvSpPr>
+          <p:cNvPr id="13" name="TextBox 12"/>
           <p:cNvSpPr txBox="1"/>
           <p:nvPr/>
         </p:nvSpPr>
@@ -14704,7 +16070,7 @@
       </p:sp>
       <p:sp>
         <p:nvSpPr>
-          <p:cNvPr id="12" name="Rounded Rectangle 11"/>
+          <p:cNvPr id="14" name="Rounded Rectangle 13"/>
           <p:cNvSpPr/>
           <p:nvPr/>
         </p:nvSpPr>
@@ -14760,7 +16126,7 @@
       </p:sp>
       <p:sp>
         <p:nvSpPr>
-          <p:cNvPr id="13" name="Oval 12"/>
+          <p:cNvPr id="15" name="Oval 14"/>
           <p:cNvSpPr/>
           <p:nvPr/>
         </p:nvSpPr>
@@ -14813,7 +16179,7 @@
       </p:sp>
       <p:sp>
         <p:nvSpPr>
-          <p:cNvPr id="14" name="TextBox 13"/>
+          <p:cNvPr id="16" name="TextBox 15"/>
           <p:cNvSpPr txBox="1"/>
           <p:nvPr/>
         </p:nvSpPr>
@@ -14847,7 +16213,7 @@
       </p:sp>
       <p:sp>
         <p:nvSpPr>
-          <p:cNvPr id="15" name="Rounded Rectangle 14"/>
+          <p:cNvPr id="17" name="Rounded Rectangle 16"/>
           <p:cNvSpPr/>
           <p:nvPr/>
         </p:nvSpPr>
@@ -14903,7 +16269,7 @@
       </p:sp>
       <p:sp>
         <p:nvSpPr>
-          <p:cNvPr id="16" name="Oval 15"/>
+          <p:cNvPr id="18" name="Oval 17"/>
           <p:cNvSpPr/>
           <p:nvPr/>
         </p:nvSpPr>
@@ -14956,7 +16322,7 @@
       </p:sp>
       <p:sp>
         <p:nvSpPr>
-          <p:cNvPr id="17" name="TextBox 16"/>
+          <p:cNvPr id="19" name="TextBox 18"/>
           <p:cNvSpPr txBox="1"/>
           <p:nvPr/>
         </p:nvSpPr>
@@ -14990,7 +16356,7 @@
       </p:sp>
       <p:sp>
         <p:nvSpPr>
-          <p:cNvPr id="18" name="Rounded Rectangle 17"/>
+          <p:cNvPr id="20" name="Rounded Rectangle 19"/>
           <p:cNvSpPr/>
           <p:nvPr/>
         </p:nvSpPr>
@@ -15049,7 +16415,7 @@
       </p:sp>
       <p:sp>
         <p:nvSpPr>
-          <p:cNvPr id="19" name="Oval 18"/>
+          <p:cNvPr id="21" name="Oval 20"/>
           <p:cNvSpPr/>
           <p:nvPr/>
         </p:nvSpPr>
@@ -15102,7 +16468,7 @@
       </p:sp>
       <p:sp>
         <p:nvSpPr>
-          <p:cNvPr id="20" name="TextBox 19"/>
+          <p:cNvPr id="22" name="TextBox 21"/>
           <p:cNvSpPr txBox="1"/>
           <p:nvPr/>
         </p:nvSpPr>
@@ -15136,7 +16502,7 @@
       </p:sp>
       <p:sp>
         <p:nvSpPr>
-          <p:cNvPr id="21" name="Rounded Rectangle 20"/>
+          <p:cNvPr id="23" name="Rounded Rectangle 22"/>
           <p:cNvSpPr/>
           <p:nvPr/>
         </p:nvSpPr>
@@ -15192,7 +16558,7 @@
       </p:sp>
       <p:sp>
         <p:nvSpPr>
-          <p:cNvPr id="22" name="Oval 21"/>
+          <p:cNvPr id="24" name="Oval 23"/>
           <p:cNvSpPr/>
           <p:nvPr/>
         </p:nvSpPr>
@@ -15245,7 +16611,7 @@
       </p:sp>
       <p:sp>
         <p:nvSpPr>
-          <p:cNvPr id="23" name="TextBox 22"/>
+          <p:cNvPr id="25" name="TextBox 24"/>
           <p:cNvSpPr txBox="1"/>
           <p:nvPr/>
         </p:nvSpPr>
@@ -15279,7 +16645,7 @@
       </p:sp>
       <p:sp>
         <p:nvSpPr>
-          <p:cNvPr id="24" name="TextBox 23"/>
+          <p:cNvPr id="26" name="TextBox 25"/>
           <p:cNvSpPr txBox="1"/>
           <p:nvPr/>
         </p:nvSpPr>
@@ -15703,7 +17069,111 @@
       </p:pic>
       <p:sp>
         <p:nvSpPr>
-          <p:cNvPr id="11" name="TextBox 10"/>
+          <p:cNvPr id="11" name="Rounded Rectangle 10"/>
+          <p:cNvSpPr/>
+          <p:nvPr/>
+        </p:nvSpPr>
+        <p:spPr>
+          <a:xfrm>
+            <a:off x="411479" y="1444752"/>
+            <a:ext cx="11368735" cy="4800600"/>
+          </a:xfrm>
+          <a:prstGeom prst="roundRect">
+            <a:avLst>
+              <a:gd name="adj" fmla="val 4000"/>
+            </a:avLst>
+          </a:prstGeom>
+          <a:solidFill>
+            <a:srgbClr val="FFFFFF">
+              <a:alpha val="84000"/>
+            </a:srgbClr>
+          </a:solidFill>
+          <a:ln w="19050">
+            <a:solidFill>
+              <a:srgbClr val="FFFFFF"/>
+            </a:solidFill>
+          </a:ln>
+          <a:effectLst>
+            <a:outerShdw blurRad="203200" dist="50800" dir="5400000" algn="t" rotWithShape="0">
+              <a:srgbClr val="1A2340">
+                <a:alpha val="20000"/>
+              </a:srgbClr>
+            </a:outerShdw>
+          </a:effectLst>
+        </p:spPr>
+        <p:style>
+          <a:lnRef idx="1">
+            <a:schemeClr val="accent1"/>
+          </a:lnRef>
+          <a:fillRef idx="3">
+            <a:schemeClr val="accent1"/>
+          </a:fillRef>
+          <a:effectRef idx="2">
+            <a:schemeClr val="accent1"/>
+          </a:effectRef>
+          <a:fontRef idx="minor">
+            <a:schemeClr val="lt1"/>
+          </a:fontRef>
+        </p:style>
+        <p:txBody>
+          <a:bodyPr rtlCol="0" anchor="ctr"/>
+          <a:lstStyle/>
+          <a:p>
+            <a:pPr algn="ctr"/>
+          </a:p>
+        </p:txBody>
+      </p:sp>
+      <p:sp>
+        <p:nvSpPr>
+          <p:cNvPr id="12" name="Rounded Rectangle 11"/>
+          <p:cNvSpPr/>
+          <p:nvPr/>
+        </p:nvSpPr>
+        <p:spPr>
+          <a:xfrm>
+            <a:off x="731519" y="1508760"/>
+            <a:ext cx="10728655" cy="32004"/>
+          </a:xfrm>
+          <a:prstGeom prst="roundRect">
+            <a:avLst>
+              <a:gd name="adj" fmla="val 50000"/>
+            </a:avLst>
+          </a:prstGeom>
+          <a:solidFill>
+            <a:srgbClr val="FFFFFF">
+              <a:alpha val="85000"/>
+            </a:srgbClr>
+          </a:solidFill>
+          <a:ln>
+            <a:noFill/>
+          </a:ln>
+          <a:effectLst/>
+        </p:spPr>
+        <p:style>
+          <a:lnRef idx="1">
+            <a:schemeClr val="accent1"/>
+          </a:lnRef>
+          <a:fillRef idx="3">
+            <a:schemeClr val="accent1"/>
+          </a:fillRef>
+          <a:effectRef idx="2">
+            <a:schemeClr val="accent1"/>
+          </a:effectRef>
+          <a:fontRef idx="minor">
+            <a:schemeClr val="lt1"/>
+          </a:fontRef>
+        </p:style>
+        <p:txBody>
+          <a:bodyPr rtlCol="0" anchor="ctr"/>
+          <a:lstStyle/>
+          <a:p>
+            <a:pPr algn="ctr"/>
+          </a:p>
+        </p:txBody>
+      </p:sp>
+      <p:sp>
+        <p:nvSpPr>
+          <p:cNvPr id="13" name="TextBox 12"/>
           <p:cNvSpPr txBox="1"/>
           <p:nvPr/>
         </p:nvSpPr>
@@ -15737,7 +17207,7 @@
       </p:sp>
       <p:sp>
         <p:nvSpPr>
-          <p:cNvPr id="12" name="Rounded Rectangle 11"/>
+          <p:cNvPr id="14" name="Rounded Rectangle 13"/>
           <p:cNvSpPr/>
           <p:nvPr/>
         </p:nvSpPr>
@@ -15793,7 +17263,7 @@
       </p:sp>
       <p:sp>
         <p:nvSpPr>
-          <p:cNvPr id="13" name="Oval 12"/>
+          <p:cNvPr id="15" name="Oval 14"/>
           <p:cNvSpPr/>
           <p:nvPr/>
         </p:nvSpPr>
@@ -15846,7 +17316,7 @@
       </p:sp>
       <p:sp>
         <p:nvSpPr>
-          <p:cNvPr id="14" name="TextBox 13"/>
+          <p:cNvPr id="16" name="TextBox 15"/>
           <p:cNvSpPr txBox="1"/>
           <p:nvPr/>
         </p:nvSpPr>
@@ -15880,7 +17350,7 @@
       </p:sp>
       <p:sp>
         <p:nvSpPr>
-          <p:cNvPr id="15" name="Rounded Rectangle 14"/>
+          <p:cNvPr id="17" name="Rounded Rectangle 16"/>
           <p:cNvSpPr/>
           <p:nvPr/>
         </p:nvSpPr>
@@ -15936,7 +17406,7 @@
       </p:sp>
       <p:sp>
         <p:nvSpPr>
-          <p:cNvPr id="16" name="Oval 15"/>
+          <p:cNvPr id="18" name="Oval 17"/>
           <p:cNvSpPr/>
           <p:nvPr/>
         </p:nvSpPr>
@@ -15989,7 +17459,7 @@
       </p:sp>
       <p:sp>
         <p:nvSpPr>
-          <p:cNvPr id="17" name="TextBox 16"/>
+          <p:cNvPr id="19" name="TextBox 18"/>
           <p:cNvSpPr txBox="1"/>
           <p:nvPr/>
         </p:nvSpPr>
@@ -16023,7 +17493,7 @@
       </p:sp>
       <p:sp>
         <p:nvSpPr>
-          <p:cNvPr id="18" name="Rounded Rectangle 17"/>
+          <p:cNvPr id="20" name="Rounded Rectangle 19"/>
           <p:cNvSpPr/>
           <p:nvPr/>
         </p:nvSpPr>
@@ -16079,7 +17549,7 @@
       </p:sp>
       <p:sp>
         <p:nvSpPr>
-          <p:cNvPr id="19" name="Oval 18"/>
+          <p:cNvPr id="21" name="Oval 20"/>
           <p:cNvSpPr/>
           <p:nvPr/>
         </p:nvSpPr>
@@ -16132,7 +17602,7 @@
       </p:sp>
       <p:sp>
         <p:nvSpPr>
-          <p:cNvPr id="20" name="TextBox 19"/>
+          <p:cNvPr id="22" name="TextBox 21"/>
           <p:cNvSpPr txBox="1"/>
           <p:nvPr/>
         </p:nvSpPr>
@@ -16166,7 +17636,7 @@
       </p:sp>
       <p:sp>
         <p:nvSpPr>
-          <p:cNvPr id="21" name="Rounded Rectangle 20"/>
+          <p:cNvPr id="23" name="Rounded Rectangle 22"/>
           <p:cNvSpPr/>
           <p:nvPr/>
         </p:nvSpPr>
@@ -16222,7 +17692,7 @@
       </p:sp>
       <p:sp>
         <p:nvSpPr>
-          <p:cNvPr id="22" name="Oval 21"/>
+          <p:cNvPr id="24" name="Oval 23"/>
           <p:cNvSpPr/>
           <p:nvPr/>
         </p:nvSpPr>
@@ -16275,7 +17745,7 @@
       </p:sp>
       <p:sp>
         <p:nvSpPr>
-          <p:cNvPr id="23" name="TextBox 22"/>
+          <p:cNvPr id="25" name="TextBox 24"/>
           <p:cNvSpPr txBox="1"/>
           <p:nvPr/>
         </p:nvSpPr>
@@ -16690,7 +18160,111 @@
       </p:pic>
       <p:sp>
         <p:nvSpPr>
-          <p:cNvPr id="11" name="TextBox 10"/>
+          <p:cNvPr id="11" name="Rounded Rectangle 10"/>
+          <p:cNvSpPr/>
+          <p:nvPr/>
+        </p:nvSpPr>
+        <p:spPr>
+          <a:xfrm>
+            <a:off x="411479" y="1444752"/>
+            <a:ext cx="11368735" cy="4800600"/>
+          </a:xfrm>
+          <a:prstGeom prst="roundRect">
+            <a:avLst>
+              <a:gd name="adj" fmla="val 4000"/>
+            </a:avLst>
+          </a:prstGeom>
+          <a:solidFill>
+            <a:srgbClr val="FFFFFF">
+              <a:alpha val="84000"/>
+            </a:srgbClr>
+          </a:solidFill>
+          <a:ln w="19050">
+            <a:solidFill>
+              <a:srgbClr val="FFFFFF"/>
+            </a:solidFill>
+          </a:ln>
+          <a:effectLst>
+            <a:outerShdw blurRad="203200" dist="50800" dir="5400000" algn="t" rotWithShape="0">
+              <a:srgbClr val="1A2340">
+                <a:alpha val="20000"/>
+              </a:srgbClr>
+            </a:outerShdw>
+          </a:effectLst>
+        </p:spPr>
+        <p:style>
+          <a:lnRef idx="1">
+            <a:schemeClr val="accent1"/>
+          </a:lnRef>
+          <a:fillRef idx="3">
+            <a:schemeClr val="accent1"/>
+          </a:fillRef>
+          <a:effectRef idx="2">
+            <a:schemeClr val="accent1"/>
+          </a:effectRef>
+          <a:fontRef idx="minor">
+            <a:schemeClr val="lt1"/>
+          </a:fontRef>
+        </p:style>
+        <p:txBody>
+          <a:bodyPr rtlCol="0" anchor="ctr"/>
+          <a:lstStyle/>
+          <a:p>
+            <a:pPr algn="ctr"/>
+          </a:p>
+        </p:txBody>
+      </p:sp>
+      <p:sp>
+        <p:nvSpPr>
+          <p:cNvPr id="12" name="Rounded Rectangle 11"/>
+          <p:cNvSpPr/>
+          <p:nvPr/>
+        </p:nvSpPr>
+        <p:spPr>
+          <a:xfrm>
+            <a:off x="731519" y="1508760"/>
+            <a:ext cx="10728655" cy="32004"/>
+          </a:xfrm>
+          <a:prstGeom prst="roundRect">
+            <a:avLst>
+              <a:gd name="adj" fmla="val 50000"/>
+            </a:avLst>
+          </a:prstGeom>
+          <a:solidFill>
+            <a:srgbClr val="FFFFFF">
+              <a:alpha val="85000"/>
+            </a:srgbClr>
+          </a:solidFill>
+          <a:ln>
+            <a:noFill/>
+          </a:ln>
+          <a:effectLst/>
+        </p:spPr>
+        <p:style>
+          <a:lnRef idx="1">
+            <a:schemeClr val="accent1"/>
+          </a:lnRef>
+          <a:fillRef idx="3">
+            <a:schemeClr val="accent1"/>
+          </a:fillRef>
+          <a:effectRef idx="2">
+            <a:schemeClr val="accent1"/>
+          </a:effectRef>
+          <a:fontRef idx="minor">
+            <a:schemeClr val="lt1"/>
+          </a:fontRef>
+        </p:style>
+        <p:txBody>
+          <a:bodyPr rtlCol="0" anchor="ctr"/>
+          <a:lstStyle/>
+          <a:p>
+            <a:pPr algn="ctr"/>
+          </a:p>
+        </p:txBody>
+      </p:sp>
+      <p:sp>
+        <p:nvSpPr>
+          <p:cNvPr id="13" name="TextBox 12"/>
           <p:cNvSpPr txBox="1"/>
           <p:nvPr/>
         </p:nvSpPr>
@@ -16724,7 +18298,7 @@
       </p:sp>
       <p:sp>
         <p:nvSpPr>
-          <p:cNvPr id="12" name="Rounded Rectangle 11"/>
+          <p:cNvPr id="14" name="Rounded Rectangle 13"/>
           <p:cNvSpPr/>
           <p:nvPr/>
         </p:nvSpPr>
@@ -16783,7 +18357,7 @@
       </p:sp>
       <p:sp>
         <p:nvSpPr>
-          <p:cNvPr id="13" name="Oval 12"/>
+          <p:cNvPr id="15" name="Oval 14"/>
           <p:cNvSpPr/>
           <p:nvPr/>
         </p:nvSpPr>
@@ -16836,7 +18410,7 @@
       </p:sp>
       <p:sp>
         <p:nvSpPr>
-          <p:cNvPr id="14" name="TextBox 13"/>
+          <p:cNvPr id="16" name="TextBox 15"/>
           <p:cNvSpPr txBox="1"/>
           <p:nvPr/>
         </p:nvSpPr>
@@ -16870,7 +18444,7 @@
       </p:sp>
       <p:sp>
         <p:nvSpPr>
-          <p:cNvPr id="15" name="Rounded Rectangle 14"/>
+          <p:cNvPr id="17" name="Rounded Rectangle 16"/>
           <p:cNvSpPr/>
           <p:nvPr/>
         </p:nvSpPr>
@@ -16926,7 +18500,7 @@
       </p:sp>
       <p:sp>
         <p:nvSpPr>
-          <p:cNvPr id="16" name="Oval 15"/>
+          <p:cNvPr id="18" name="Oval 17"/>
           <p:cNvSpPr/>
           <p:nvPr/>
         </p:nvSpPr>
@@ -16979,7 +18553,7 @@
       </p:sp>
       <p:sp>
         <p:nvSpPr>
-          <p:cNvPr id="17" name="TextBox 16"/>
+          <p:cNvPr id="19" name="TextBox 18"/>
           <p:cNvSpPr txBox="1"/>
           <p:nvPr/>
         </p:nvSpPr>
@@ -17013,7 +18587,7 @@
       </p:sp>
       <p:sp>
         <p:nvSpPr>
-          <p:cNvPr id="18" name="Rounded Rectangle 17"/>
+          <p:cNvPr id="20" name="Rounded Rectangle 19"/>
           <p:cNvSpPr/>
           <p:nvPr/>
         </p:nvSpPr>
@@ -17069,7 +18643,7 @@
       </p:sp>
       <p:sp>
         <p:nvSpPr>
-          <p:cNvPr id="19" name="Oval 18"/>
+          <p:cNvPr id="21" name="Oval 20"/>
           <p:cNvSpPr/>
           <p:nvPr/>
         </p:nvSpPr>
@@ -17122,7 +18696,7 @@
       </p:sp>
       <p:sp>
         <p:nvSpPr>
-          <p:cNvPr id="20" name="TextBox 19"/>
+          <p:cNvPr id="22" name="TextBox 21"/>
           <p:cNvSpPr txBox="1"/>
           <p:nvPr/>
         </p:nvSpPr>
@@ -17156,7 +18730,7 @@
       </p:sp>
       <p:sp>
         <p:nvSpPr>
-          <p:cNvPr id="21" name="Rounded Rectangle 20"/>
+          <p:cNvPr id="23" name="Rounded Rectangle 22"/>
           <p:cNvSpPr/>
           <p:nvPr/>
         </p:nvSpPr>
@@ -17212,7 +18786,7 @@
       </p:sp>
       <p:sp>
         <p:nvSpPr>
-          <p:cNvPr id="22" name="Oval 21"/>
+          <p:cNvPr id="24" name="Oval 23"/>
           <p:cNvSpPr/>
           <p:nvPr/>
         </p:nvSpPr>
@@ -17265,7 +18839,7 @@
       </p:sp>
       <p:sp>
         <p:nvSpPr>
-          <p:cNvPr id="23" name="TextBox 22"/>
+          <p:cNvPr id="25" name="TextBox 24"/>
           <p:cNvSpPr txBox="1"/>
           <p:nvPr/>
         </p:nvSpPr>
@@ -17299,7 +18873,7 @@
       </p:sp>
       <p:sp>
         <p:nvSpPr>
-          <p:cNvPr id="24" name="TextBox 23"/>
+          <p:cNvPr id="26" name="TextBox 25"/>
           <p:cNvSpPr txBox="1"/>
           <p:nvPr/>
         </p:nvSpPr>
@@ -17723,7 +19297,111 @@
       </p:pic>
       <p:sp>
         <p:nvSpPr>
-          <p:cNvPr id="11" name="TextBox 10"/>
+          <p:cNvPr id="11" name="Rounded Rectangle 10"/>
+          <p:cNvSpPr/>
+          <p:nvPr/>
+        </p:nvSpPr>
+        <p:spPr>
+          <a:xfrm>
+            <a:off x="411479" y="1444752"/>
+            <a:ext cx="11368735" cy="4800600"/>
+          </a:xfrm>
+          <a:prstGeom prst="roundRect">
+            <a:avLst>
+              <a:gd name="adj" fmla="val 4000"/>
+            </a:avLst>
+          </a:prstGeom>
+          <a:solidFill>
+            <a:srgbClr val="FFFFFF">
+              <a:alpha val="84000"/>
+            </a:srgbClr>
+          </a:solidFill>
+          <a:ln w="19050">
+            <a:solidFill>
+              <a:srgbClr val="FFFFFF"/>
+            </a:solidFill>
+          </a:ln>
+          <a:effectLst>
+            <a:outerShdw blurRad="203200" dist="50800" dir="5400000" algn="t" rotWithShape="0">
+              <a:srgbClr val="1A2340">
+                <a:alpha val="20000"/>
+              </a:srgbClr>
+            </a:outerShdw>
+          </a:effectLst>
+        </p:spPr>
+        <p:style>
+          <a:lnRef idx="1">
+            <a:schemeClr val="accent1"/>
+          </a:lnRef>
+          <a:fillRef idx="3">
+            <a:schemeClr val="accent1"/>
+          </a:fillRef>
+          <a:effectRef idx="2">
+            <a:schemeClr val="accent1"/>
+          </a:effectRef>
+          <a:fontRef idx="minor">
+            <a:schemeClr val="lt1"/>
+          </a:fontRef>
+        </p:style>
+        <p:txBody>
+          <a:bodyPr rtlCol="0" anchor="ctr"/>
+          <a:lstStyle/>
+          <a:p>
+            <a:pPr algn="ctr"/>
+          </a:p>
+        </p:txBody>
+      </p:sp>
+      <p:sp>
+        <p:nvSpPr>
+          <p:cNvPr id="12" name="Rounded Rectangle 11"/>
+          <p:cNvSpPr/>
+          <p:nvPr/>
+        </p:nvSpPr>
+        <p:spPr>
+          <a:xfrm>
+            <a:off x="731519" y="1508760"/>
+            <a:ext cx="10728655" cy="32004"/>
+          </a:xfrm>
+          <a:prstGeom prst="roundRect">
+            <a:avLst>
+              <a:gd name="adj" fmla="val 50000"/>
+            </a:avLst>
+          </a:prstGeom>
+          <a:solidFill>
+            <a:srgbClr val="FFFFFF">
+              <a:alpha val="85000"/>
+            </a:srgbClr>
+          </a:solidFill>
+          <a:ln>
+            <a:noFill/>
+          </a:ln>
+          <a:effectLst/>
+        </p:spPr>
+        <p:style>
+          <a:lnRef idx="1">
+            <a:schemeClr val="accent1"/>
+          </a:lnRef>
+          <a:fillRef idx="3">
+            <a:schemeClr val="accent1"/>
+          </a:fillRef>
+          <a:effectRef idx="2">
+            <a:schemeClr val="accent1"/>
+          </a:effectRef>
+          <a:fontRef idx="minor">
+            <a:schemeClr val="lt1"/>
+          </a:fontRef>
+        </p:style>
+        <p:txBody>
+          <a:bodyPr rtlCol="0" anchor="ctr"/>
+          <a:lstStyle/>
+          <a:p>
+            <a:pPr algn="ctr"/>
+          </a:p>
+        </p:txBody>
+      </p:sp>
+      <p:sp>
+        <p:nvSpPr>
+          <p:cNvPr id="13" name="TextBox 12"/>
           <p:cNvSpPr txBox="1"/>
           <p:nvPr/>
         </p:nvSpPr>
@@ -17757,7 +19435,7 @@
       </p:sp>
       <p:sp>
         <p:nvSpPr>
-          <p:cNvPr id="12" name="Rounded Rectangle 11"/>
+          <p:cNvPr id="14" name="Rounded Rectangle 13"/>
           <p:cNvSpPr/>
           <p:nvPr/>
         </p:nvSpPr>
@@ -17813,7 +19491,7 @@
       </p:sp>
       <p:sp>
         <p:nvSpPr>
-          <p:cNvPr id="13" name="Oval 12"/>
+          <p:cNvPr id="15" name="Oval 14"/>
           <p:cNvSpPr/>
           <p:nvPr/>
         </p:nvSpPr>
@@ -17866,7 +19544,7 @@
       </p:sp>
       <p:sp>
         <p:nvSpPr>
-          <p:cNvPr id="14" name="TextBox 13"/>
+          <p:cNvPr id="16" name="TextBox 15"/>
           <p:cNvSpPr txBox="1"/>
           <p:nvPr/>
         </p:nvSpPr>
@@ -17900,7 +19578,7 @@
       </p:sp>
       <p:sp>
         <p:nvSpPr>
-          <p:cNvPr id="15" name="Rounded Rectangle 14"/>
+          <p:cNvPr id="17" name="Rounded Rectangle 16"/>
           <p:cNvSpPr/>
           <p:nvPr/>
         </p:nvSpPr>
@@ -17956,7 +19634,7 @@
       </p:sp>
       <p:sp>
         <p:nvSpPr>
-          <p:cNvPr id="16" name="Oval 15"/>
+          <p:cNvPr id="18" name="Oval 17"/>
           <p:cNvSpPr/>
           <p:nvPr/>
         </p:nvSpPr>
@@ -18009,7 +19687,7 @@
       </p:sp>
       <p:sp>
         <p:nvSpPr>
-          <p:cNvPr id="17" name="TextBox 16"/>
+          <p:cNvPr id="19" name="TextBox 18"/>
           <p:cNvSpPr txBox="1"/>
           <p:nvPr/>
         </p:nvSpPr>
@@ -18043,7 +19721,7 @@
       </p:sp>
       <p:sp>
         <p:nvSpPr>
-          <p:cNvPr id="18" name="Rounded Rectangle 17"/>
+          <p:cNvPr id="20" name="Rounded Rectangle 19"/>
           <p:cNvSpPr/>
           <p:nvPr/>
         </p:nvSpPr>
@@ -18099,7 +19777,7 @@
       </p:sp>
       <p:sp>
         <p:nvSpPr>
-          <p:cNvPr id="19" name="Oval 18"/>
+          <p:cNvPr id="21" name="Oval 20"/>
           <p:cNvSpPr/>
           <p:nvPr/>
         </p:nvSpPr>
@@ -18152,7 +19830,7 @@
       </p:sp>
       <p:sp>
         <p:nvSpPr>
-          <p:cNvPr id="20" name="TextBox 19"/>
+          <p:cNvPr id="22" name="TextBox 21"/>
           <p:cNvSpPr txBox="1"/>
           <p:nvPr/>
         </p:nvSpPr>
@@ -18186,7 +19864,7 @@
       </p:sp>
       <p:sp>
         <p:nvSpPr>
-          <p:cNvPr id="21" name="Rounded Rectangle 20"/>
+          <p:cNvPr id="23" name="Rounded Rectangle 22"/>
           <p:cNvSpPr/>
           <p:nvPr/>
         </p:nvSpPr>
@@ -18242,7 +19920,7 @@
       </p:sp>
       <p:sp>
         <p:nvSpPr>
-          <p:cNvPr id="22" name="Oval 21"/>
+          <p:cNvPr id="24" name="Oval 23"/>
           <p:cNvSpPr/>
           <p:nvPr/>
         </p:nvSpPr>
@@ -18295,7 +19973,7 @@
       </p:sp>
       <p:sp>
         <p:nvSpPr>
-          <p:cNvPr id="23" name="TextBox 22"/>
+          <p:cNvPr id="25" name="TextBox 24"/>
           <p:cNvSpPr txBox="1"/>
           <p:nvPr/>
         </p:nvSpPr>
@@ -18710,7 +20388,111 @@
       </p:pic>
       <p:sp>
         <p:nvSpPr>
-          <p:cNvPr id="11" name="TextBox 10"/>
+          <p:cNvPr id="11" name="Rounded Rectangle 10"/>
+          <p:cNvSpPr/>
+          <p:nvPr/>
+        </p:nvSpPr>
+        <p:spPr>
+          <a:xfrm>
+            <a:off x="411479" y="1444752"/>
+            <a:ext cx="11368735" cy="4800600"/>
+          </a:xfrm>
+          <a:prstGeom prst="roundRect">
+            <a:avLst>
+              <a:gd name="adj" fmla="val 4000"/>
+            </a:avLst>
+          </a:prstGeom>
+          <a:solidFill>
+            <a:srgbClr val="FFFFFF">
+              <a:alpha val="84000"/>
+            </a:srgbClr>
+          </a:solidFill>
+          <a:ln w="19050">
+            <a:solidFill>
+              <a:srgbClr val="FFFFFF"/>
+            </a:solidFill>
+          </a:ln>
+          <a:effectLst>
+            <a:outerShdw blurRad="203200" dist="50800" dir="5400000" algn="t" rotWithShape="0">
+              <a:srgbClr val="1A2340">
+                <a:alpha val="20000"/>
+              </a:srgbClr>
+            </a:outerShdw>
+          </a:effectLst>
+        </p:spPr>
+        <p:style>
+          <a:lnRef idx="1">
+            <a:schemeClr val="accent1"/>
+          </a:lnRef>
+          <a:fillRef idx="3">
+            <a:schemeClr val="accent1"/>
+          </a:fillRef>
+          <a:effectRef idx="2">
+            <a:schemeClr val="accent1"/>
+          </a:effectRef>
+          <a:fontRef idx="minor">
+            <a:schemeClr val="lt1"/>
+          </a:fontRef>
+        </p:style>
+        <p:txBody>
+          <a:bodyPr rtlCol="0" anchor="ctr"/>
+          <a:lstStyle/>
+          <a:p>
+            <a:pPr algn="ctr"/>
+          </a:p>
+        </p:txBody>
+      </p:sp>
+      <p:sp>
+        <p:nvSpPr>
+          <p:cNvPr id="12" name="Rounded Rectangle 11"/>
+          <p:cNvSpPr/>
+          <p:nvPr/>
+        </p:nvSpPr>
+        <p:spPr>
+          <a:xfrm>
+            <a:off x="731519" y="1508760"/>
+            <a:ext cx="10728655" cy="32004"/>
+          </a:xfrm>
+          <a:prstGeom prst="roundRect">
+            <a:avLst>
+              <a:gd name="adj" fmla="val 50000"/>
+            </a:avLst>
+          </a:prstGeom>
+          <a:solidFill>
+            <a:srgbClr val="FFFFFF">
+              <a:alpha val="85000"/>
+            </a:srgbClr>
+          </a:solidFill>
+          <a:ln>
+            <a:noFill/>
+          </a:ln>
+          <a:effectLst/>
+        </p:spPr>
+        <p:style>
+          <a:lnRef idx="1">
+            <a:schemeClr val="accent1"/>
+          </a:lnRef>
+          <a:fillRef idx="3">
+            <a:schemeClr val="accent1"/>
+          </a:fillRef>
+          <a:effectRef idx="2">
+            <a:schemeClr val="accent1"/>
+          </a:effectRef>
+          <a:fontRef idx="minor">
+            <a:schemeClr val="lt1"/>
+          </a:fontRef>
+        </p:style>
+        <p:txBody>
+          <a:bodyPr rtlCol="0" anchor="ctr"/>
+          <a:lstStyle/>
+          <a:p>
+            <a:pPr algn="ctr"/>
+          </a:p>
+        </p:txBody>
+      </p:sp>
+      <p:sp>
+        <p:nvSpPr>
+          <p:cNvPr id="13" name="TextBox 12"/>
           <p:cNvSpPr txBox="1"/>
           <p:nvPr/>
         </p:nvSpPr>
@@ -18744,7 +20526,7 @@
       </p:sp>
       <p:sp>
         <p:nvSpPr>
-          <p:cNvPr id="12" name="Rounded Rectangle 11"/>
+          <p:cNvPr id="14" name="Rounded Rectangle 13"/>
           <p:cNvSpPr/>
           <p:nvPr/>
         </p:nvSpPr>
@@ -18800,7 +20582,7 @@
       </p:sp>
       <p:sp>
         <p:nvSpPr>
-          <p:cNvPr id="13" name="Oval 12"/>
+          <p:cNvPr id="15" name="Oval 14"/>
           <p:cNvSpPr/>
           <p:nvPr/>
         </p:nvSpPr>
@@ -18853,7 +20635,7 @@
       </p:sp>
       <p:sp>
         <p:nvSpPr>
-          <p:cNvPr id="14" name="TextBox 13"/>
+          <p:cNvPr id="16" name="TextBox 15"/>
           <p:cNvSpPr txBox="1"/>
           <p:nvPr/>
         </p:nvSpPr>
@@ -18887,7 +20669,7 @@
       </p:sp>
       <p:sp>
         <p:nvSpPr>
-          <p:cNvPr id="15" name="Rounded Rectangle 14"/>
+          <p:cNvPr id="17" name="Rounded Rectangle 16"/>
           <p:cNvSpPr/>
           <p:nvPr/>
         </p:nvSpPr>
@@ -18943,7 +20725,7 @@
       </p:sp>
       <p:sp>
         <p:nvSpPr>
-          <p:cNvPr id="16" name="Oval 15"/>
+          <p:cNvPr id="18" name="Oval 17"/>
           <p:cNvSpPr/>
           <p:nvPr/>
         </p:nvSpPr>
@@ -18996,7 +20778,7 @@
       </p:sp>
       <p:sp>
         <p:nvSpPr>
-          <p:cNvPr id="17" name="TextBox 16"/>
+          <p:cNvPr id="19" name="TextBox 18"/>
           <p:cNvSpPr txBox="1"/>
           <p:nvPr/>
         </p:nvSpPr>
@@ -19030,7 +20812,7 @@
       </p:sp>
       <p:sp>
         <p:nvSpPr>
-          <p:cNvPr id="18" name="Rounded Rectangle 17"/>
+          <p:cNvPr id="20" name="Rounded Rectangle 19"/>
           <p:cNvSpPr/>
           <p:nvPr/>
         </p:nvSpPr>
@@ -19086,7 +20868,7 @@
       </p:sp>
       <p:sp>
         <p:nvSpPr>
-          <p:cNvPr id="19" name="Oval 18"/>
+          <p:cNvPr id="21" name="Oval 20"/>
           <p:cNvSpPr/>
           <p:nvPr/>
         </p:nvSpPr>
@@ -19139,7 +20921,7 @@
       </p:sp>
       <p:sp>
         <p:nvSpPr>
-          <p:cNvPr id="20" name="TextBox 19"/>
+          <p:cNvPr id="22" name="TextBox 21"/>
           <p:cNvSpPr txBox="1"/>
           <p:nvPr/>
         </p:nvSpPr>
@@ -19173,7 +20955,7 @@
       </p:sp>
       <p:sp>
         <p:nvSpPr>
-          <p:cNvPr id="21" name="Rounded Rectangle 20"/>
+          <p:cNvPr id="23" name="Rounded Rectangle 22"/>
           <p:cNvSpPr/>
           <p:nvPr/>
         </p:nvSpPr>
@@ -19232,7 +21014,7 @@
       </p:sp>
       <p:sp>
         <p:nvSpPr>
-          <p:cNvPr id="22" name="Oval 21"/>
+          <p:cNvPr id="24" name="Oval 23"/>
           <p:cNvSpPr/>
           <p:nvPr/>
         </p:nvSpPr>
@@ -19285,7 +21067,7 @@
       </p:sp>
       <p:sp>
         <p:nvSpPr>
-          <p:cNvPr id="23" name="TextBox 22"/>
+          <p:cNvPr id="25" name="TextBox 24"/>
           <p:cNvSpPr txBox="1"/>
           <p:nvPr/>
         </p:nvSpPr>
@@ -19319,7 +21101,7 @@
       </p:sp>
       <p:sp>
         <p:nvSpPr>
-          <p:cNvPr id="24" name="TextBox 23"/>
+          <p:cNvPr id="26" name="TextBox 25"/>
           <p:cNvSpPr txBox="1"/>
           <p:nvPr/>
         </p:nvSpPr>
@@ -20431,7 +22213,111 @@
       </p:pic>
       <p:sp>
         <p:nvSpPr>
-          <p:cNvPr id="11" name="Oval 10"/>
+          <p:cNvPr id="11" name="Rounded Rectangle 10"/>
+          <p:cNvSpPr/>
+          <p:nvPr/>
+        </p:nvSpPr>
+        <p:spPr>
+          <a:xfrm>
+            <a:off x="411479" y="1444752"/>
+            <a:ext cx="11368735" cy="4800600"/>
+          </a:xfrm>
+          <a:prstGeom prst="roundRect">
+            <a:avLst>
+              <a:gd name="adj" fmla="val 4000"/>
+            </a:avLst>
+          </a:prstGeom>
+          <a:solidFill>
+            <a:srgbClr val="FFFFFF">
+              <a:alpha val="84000"/>
+            </a:srgbClr>
+          </a:solidFill>
+          <a:ln w="19050">
+            <a:solidFill>
+              <a:srgbClr val="FFFFFF"/>
+            </a:solidFill>
+          </a:ln>
+          <a:effectLst>
+            <a:outerShdw blurRad="203200" dist="50800" dir="5400000" algn="t" rotWithShape="0">
+              <a:srgbClr val="1A2340">
+                <a:alpha val="20000"/>
+              </a:srgbClr>
+            </a:outerShdw>
+          </a:effectLst>
+        </p:spPr>
+        <p:style>
+          <a:lnRef idx="1">
+            <a:schemeClr val="accent1"/>
+          </a:lnRef>
+          <a:fillRef idx="3">
+            <a:schemeClr val="accent1"/>
+          </a:fillRef>
+          <a:effectRef idx="2">
+            <a:schemeClr val="accent1"/>
+          </a:effectRef>
+          <a:fontRef idx="minor">
+            <a:schemeClr val="lt1"/>
+          </a:fontRef>
+        </p:style>
+        <p:txBody>
+          <a:bodyPr rtlCol="0" anchor="ctr"/>
+          <a:lstStyle/>
+          <a:p>
+            <a:pPr algn="ctr"/>
+          </a:p>
+        </p:txBody>
+      </p:sp>
+      <p:sp>
+        <p:nvSpPr>
+          <p:cNvPr id="12" name="Rounded Rectangle 11"/>
+          <p:cNvSpPr/>
+          <p:nvPr/>
+        </p:nvSpPr>
+        <p:spPr>
+          <a:xfrm>
+            <a:off x="731519" y="1508760"/>
+            <a:ext cx="10728655" cy="32004"/>
+          </a:xfrm>
+          <a:prstGeom prst="roundRect">
+            <a:avLst>
+              <a:gd name="adj" fmla="val 50000"/>
+            </a:avLst>
+          </a:prstGeom>
+          <a:solidFill>
+            <a:srgbClr val="FFFFFF">
+              <a:alpha val="85000"/>
+            </a:srgbClr>
+          </a:solidFill>
+          <a:ln>
+            <a:noFill/>
+          </a:ln>
+          <a:effectLst/>
+        </p:spPr>
+        <p:style>
+          <a:lnRef idx="1">
+            <a:schemeClr val="accent1"/>
+          </a:lnRef>
+          <a:fillRef idx="3">
+            <a:schemeClr val="accent1"/>
+          </a:fillRef>
+          <a:effectRef idx="2">
+            <a:schemeClr val="accent1"/>
+          </a:effectRef>
+          <a:fontRef idx="minor">
+            <a:schemeClr val="lt1"/>
+          </a:fontRef>
+        </p:style>
+        <p:txBody>
+          <a:bodyPr rtlCol="0" anchor="ctr"/>
+          <a:lstStyle/>
+          <a:p>
+            <a:pPr algn="ctr"/>
+          </a:p>
+        </p:txBody>
+      </p:sp>
+      <p:sp>
+        <p:nvSpPr>
+          <p:cNvPr id="13" name="Oval 12"/>
           <p:cNvSpPr/>
           <p:nvPr/>
         </p:nvSpPr>
@@ -20484,7 +22370,7 @@
       </p:sp>
       <p:sp>
         <p:nvSpPr>
-          <p:cNvPr id="12" name="TextBox 11"/>
+          <p:cNvPr id="14" name="TextBox 13"/>
           <p:cNvSpPr txBox="1"/>
           <p:nvPr/>
         </p:nvSpPr>
@@ -20518,7 +22404,7 @@
       </p:sp>
       <p:sp>
         <p:nvSpPr>
-          <p:cNvPr id="13" name="Oval 12"/>
+          <p:cNvPr id="15" name="Oval 14"/>
           <p:cNvSpPr/>
           <p:nvPr/>
         </p:nvSpPr>
@@ -20571,7 +22457,7 @@
       </p:sp>
       <p:sp>
         <p:nvSpPr>
-          <p:cNvPr id="14" name="TextBox 13"/>
+          <p:cNvPr id="16" name="TextBox 15"/>
           <p:cNvSpPr txBox="1"/>
           <p:nvPr/>
         </p:nvSpPr>
@@ -20605,7 +22491,7 @@
       </p:sp>
       <p:sp>
         <p:nvSpPr>
-          <p:cNvPr id="15" name="Oval 14"/>
+          <p:cNvPr id="17" name="Oval 16"/>
           <p:cNvSpPr/>
           <p:nvPr/>
         </p:nvSpPr>
@@ -20658,7 +22544,7 @@
       </p:sp>
       <p:sp>
         <p:nvSpPr>
-          <p:cNvPr id="16" name="TextBox 15"/>
+          <p:cNvPr id="18" name="TextBox 17"/>
           <p:cNvSpPr txBox="1"/>
           <p:nvPr/>
         </p:nvSpPr>
@@ -20692,7 +22578,7 @@
       </p:sp>
       <p:sp>
         <p:nvSpPr>
-          <p:cNvPr id="17" name="Oval 16"/>
+          <p:cNvPr id="19" name="Oval 18"/>
           <p:cNvSpPr/>
           <p:nvPr/>
         </p:nvSpPr>
@@ -20745,7 +22631,7 @@
       </p:sp>
       <p:sp>
         <p:nvSpPr>
-          <p:cNvPr id="18" name="TextBox 17"/>
+          <p:cNvPr id="20" name="TextBox 19"/>
           <p:cNvSpPr txBox="1"/>
           <p:nvPr/>
         </p:nvSpPr>
@@ -20779,7 +22665,7 @@
       </p:sp>
       <p:sp>
         <p:nvSpPr>
-          <p:cNvPr id="19" name="Oval 18"/>
+          <p:cNvPr id="21" name="Oval 20"/>
           <p:cNvSpPr/>
           <p:nvPr/>
         </p:nvSpPr>
@@ -20832,7 +22718,7 @@
       </p:sp>
       <p:sp>
         <p:nvSpPr>
-          <p:cNvPr id="20" name="TextBox 19"/>
+          <p:cNvPr id="22" name="TextBox 21"/>
           <p:cNvSpPr txBox="1"/>
           <p:nvPr/>
         </p:nvSpPr>
@@ -20866,7 +22752,7 @@
       </p:sp>
       <p:sp>
         <p:nvSpPr>
-          <p:cNvPr id="21" name="Oval 20"/>
+          <p:cNvPr id="23" name="Oval 22"/>
           <p:cNvSpPr/>
           <p:nvPr/>
         </p:nvSpPr>
@@ -20919,7 +22805,7 @@
       </p:sp>
       <p:sp>
         <p:nvSpPr>
-          <p:cNvPr id="22" name="TextBox 21"/>
+          <p:cNvPr id="24" name="TextBox 23"/>
           <p:cNvSpPr txBox="1"/>
           <p:nvPr/>
         </p:nvSpPr>
@@ -20953,7 +22839,7 @@
       </p:sp>
       <p:sp>
         <p:nvSpPr>
-          <p:cNvPr id="23" name="Oval 22"/>
+          <p:cNvPr id="25" name="Oval 24"/>
           <p:cNvSpPr/>
           <p:nvPr/>
         </p:nvSpPr>
@@ -21006,7 +22892,7 @@
       </p:sp>
       <p:sp>
         <p:nvSpPr>
-          <p:cNvPr id="24" name="TextBox 23"/>
+          <p:cNvPr id="26" name="TextBox 25"/>
           <p:cNvSpPr txBox="1"/>
           <p:nvPr/>
         </p:nvSpPr>
@@ -21040,7 +22926,7 @@
       </p:sp>
       <p:sp>
         <p:nvSpPr>
-          <p:cNvPr id="25" name="Oval 24"/>
+          <p:cNvPr id="27" name="Oval 26"/>
           <p:cNvSpPr/>
           <p:nvPr/>
         </p:nvSpPr>
@@ -21093,7 +22979,7 @@
       </p:sp>
       <p:sp>
         <p:nvSpPr>
-          <p:cNvPr id="26" name="TextBox 25"/>
+          <p:cNvPr id="28" name="TextBox 27"/>
           <p:cNvSpPr txBox="1"/>
           <p:nvPr/>
         </p:nvSpPr>
@@ -21127,7 +23013,7 @@
       </p:sp>
       <p:sp>
         <p:nvSpPr>
-          <p:cNvPr id="27" name="Oval 26"/>
+          <p:cNvPr id="29" name="Oval 28"/>
           <p:cNvSpPr/>
           <p:nvPr/>
         </p:nvSpPr>
@@ -21180,7 +23066,7 @@
       </p:sp>
       <p:sp>
         <p:nvSpPr>
-          <p:cNvPr id="28" name="TextBox 27"/>
+          <p:cNvPr id="30" name="TextBox 29"/>
           <p:cNvSpPr txBox="1"/>
           <p:nvPr/>
         </p:nvSpPr>
@@ -21593,9 +23479,113 @@
           </a:prstGeom>
         </p:spPr>
       </p:pic>
+      <p:sp>
+        <p:nvSpPr>
+          <p:cNvPr id="11" name="Rounded Rectangle 10"/>
+          <p:cNvSpPr/>
+          <p:nvPr/>
+        </p:nvSpPr>
+        <p:spPr>
+          <a:xfrm>
+            <a:off x="411479" y="1444752"/>
+            <a:ext cx="11368735" cy="4800600"/>
+          </a:xfrm>
+          <a:prstGeom prst="roundRect">
+            <a:avLst>
+              <a:gd name="adj" fmla="val 4000"/>
+            </a:avLst>
+          </a:prstGeom>
+          <a:solidFill>
+            <a:srgbClr val="FFFFFF">
+              <a:alpha val="84000"/>
+            </a:srgbClr>
+          </a:solidFill>
+          <a:ln w="19050">
+            <a:solidFill>
+              <a:srgbClr val="FFFFFF"/>
+            </a:solidFill>
+          </a:ln>
+          <a:effectLst>
+            <a:outerShdw blurRad="203200" dist="50800" dir="5400000" algn="t" rotWithShape="0">
+              <a:srgbClr val="1A2340">
+                <a:alpha val="20000"/>
+              </a:srgbClr>
+            </a:outerShdw>
+          </a:effectLst>
+        </p:spPr>
+        <p:style>
+          <a:lnRef idx="1">
+            <a:schemeClr val="accent1"/>
+          </a:lnRef>
+          <a:fillRef idx="3">
+            <a:schemeClr val="accent1"/>
+          </a:fillRef>
+          <a:effectRef idx="2">
+            <a:schemeClr val="accent1"/>
+          </a:effectRef>
+          <a:fontRef idx="minor">
+            <a:schemeClr val="lt1"/>
+          </a:fontRef>
+        </p:style>
+        <p:txBody>
+          <a:bodyPr rtlCol="0" anchor="ctr"/>
+          <a:lstStyle/>
+          <a:p>
+            <a:pPr algn="ctr"/>
+          </a:p>
+        </p:txBody>
+      </p:sp>
+      <p:sp>
+        <p:nvSpPr>
+          <p:cNvPr id="12" name="Rounded Rectangle 11"/>
+          <p:cNvSpPr/>
+          <p:nvPr/>
+        </p:nvSpPr>
+        <p:spPr>
+          <a:xfrm>
+            <a:off x="731519" y="1508760"/>
+            <a:ext cx="10728655" cy="32004"/>
+          </a:xfrm>
+          <a:prstGeom prst="roundRect">
+            <a:avLst>
+              <a:gd name="adj" fmla="val 50000"/>
+            </a:avLst>
+          </a:prstGeom>
+          <a:solidFill>
+            <a:srgbClr val="FFFFFF">
+              <a:alpha val="85000"/>
+            </a:srgbClr>
+          </a:solidFill>
+          <a:ln>
+            <a:noFill/>
+          </a:ln>
+          <a:effectLst/>
+        </p:spPr>
+        <p:style>
+          <a:lnRef idx="1">
+            <a:schemeClr val="accent1"/>
+          </a:lnRef>
+          <a:fillRef idx="3">
+            <a:schemeClr val="accent1"/>
+          </a:fillRef>
+          <a:effectRef idx="2">
+            <a:schemeClr val="accent1"/>
+          </a:effectRef>
+          <a:fontRef idx="minor">
+            <a:schemeClr val="lt1"/>
+          </a:fontRef>
+        </p:style>
+        <p:txBody>
+          <a:bodyPr rtlCol="0" anchor="ctr"/>
+          <a:lstStyle/>
+          <a:p>
+            <a:pPr algn="ctr"/>
+          </a:p>
+        </p:txBody>
+      </p:sp>
       <p:graphicFrame>
         <p:nvGraphicFramePr>
-          <p:cNvPr id="11" name="Table 10"/>
+          <p:cNvPr id="13" name="Table 12"/>
           <p:cNvGraphicFramePr>
             <a:graphicFrameLocks noGrp="1"/>
           </p:cNvGraphicFramePr>
@@ -22216,6 +24206,110 @@
       </p:pic>
       <p:sp>
         <p:nvSpPr>
+          <p:cNvPr id="10" name="Rounded Rectangle 9"/>
+          <p:cNvSpPr/>
+          <p:nvPr/>
+        </p:nvSpPr>
+        <p:spPr>
+          <a:xfrm>
+            <a:off x="4251960" y="548640"/>
+            <a:ext cx="7635240" cy="5715000"/>
+          </a:xfrm>
+          <a:prstGeom prst="roundRect">
+            <a:avLst>
+              <a:gd name="adj" fmla="val 4000"/>
+            </a:avLst>
+          </a:prstGeom>
+          <a:solidFill>
+            <a:srgbClr val="FFFFFF">
+              <a:alpha val="84000"/>
+            </a:srgbClr>
+          </a:solidFill>
+          <a:ln w="19050">
+            <a:solidFill>
+              <a:srgbClr val="FFFFFF"/>
+            </a:solidFill>
+          </a:ln>
+          <a:effectLst>
+            <a:outerShdw blurRad="203200" dist="50800" dir="5400000" algn="t" rotWithShape="0">
+              <a:srgbClr val="1A2340">
+                <a:alpha val="20000"/>
+              </a:srgbClr>
+            </a:outerShdw>
+          </a:effectLst>
+        </p:spPr>
+        <p:style>
+          <a:lnRef idx="1">
+            <a:schemeClr val="accent1"/>
+          </a:lnRef>
+          <a:fillRef idx="3">
+            <a:schemeClr val="accent1"/>
+          </a:fillRef>
+          <a:effectRef idx="2">
+            <a:schemeClr val="accent1"/>
+          </a:effectRef>
+          <a:fontRef idx="minor">
+            <a:schemeClr val="lt1"/>
+          </a:fontRef>
+        </p:style>
+        <p:txBody>
+          <a:bodyPr rtlCol="0" anchor="ctr"/>
+          <a:lstStyle/>
+          <a:p>
+            <a:pPr algn="ctr"/>
+          </a:p>
+        </p:txBody>
+      </p:sp>
+      <p:sp>
+        <p:nvSpPr>
+          <p:cNvPr id="11" name="Rounded Rectangle 10"/>
+          <p:cNvSpPr/>
+          <p:nvPr/>
+        </p:nvSpPr>
+        <p:spPr>
+          <a:xfrm>
+            <a:off x="4572000" y="612647"/>
+            <a:ext cx="6995159" cy="32004"/>
+          </a:xfrm>
+          <a:prstGeom prst="roundRect">
+            <a:avLst>
+              <a:gd name="adj" fmla="val 50000"/>
+            </a:avLst>
+          </a:prstGeom>
+          <a:solidFill>
+            <a:srgbClr val="FFFFFF">
+              <a:alpha val="85000"/>
+            </a:srgbClr>
+          </a:solidFill>
+          <a:ln>
+            <a:noFill/>
+          </a:ln>
+          <a:effectLst/>
+        </p:spPr>
+        <p:style>
+          <a:lnRef idx="1">
+            <a:schemeClr val="accent1"/>
+          </a:lnRef>
+          <a:fillRef idx="3">
+            <a:schemeClr val="accent1"/>
+          </a:fillRef>
+          <a:effectRef idx="2">
+            <a:schemeClr val="accent1"/>
+          </a:effectRef>
+          <a:fontRef idx="minor">
+            <a:schemeClr val="lt1"/>
+          </a:fontRef>
+        </p:style>
+        <p:txBody>
+          <a:bodyPr rtlCol="0" anchor="ctr"/>
+          <a:lstStyle/>
+          <a:p>
+            <a:pPr algn="ctr"/>
+          </a:p>
+        </p:txBody>
+      </p:sp>
+      <p:sp>
+        <p:nvSpPr>
           <p:cNvPr id="3" name="Rectangle 2"/>
           <p:cNvSpPr/>
           <p:nvPr/>
@@ -22852,14 +24946,177 @@
       </p:pic>
       <p:sp>
         <p:nvSpPr>
-          <p:cNvPr id="11" name="TextBox 10"/>
+          <p:cNvPr id="11" name="Rounded Rectangle 10"/>
+          <p:cNvSpPr/>
+          <p:nvPr/>
+        </p:nvSpPr>
+        <p:spPr>
+          <a:xfrm>
+            <a:off x="411479" y="1444752"/>
+            <a:ext cx="11368735" cy="4800600"/>
+          </a:xfrm>
+          <a:prstGeom prst="roundRect">
+            <a:avLst>
+              <a:gd name="adj" fmla="val 4000"/>
+            </a:avLst>
+          </a:prstGeom>
+          <a:solidFill>
+            <a:srgbClr val="FFFFFF">
+              <a:alpha val="84000"/>
+            </a:srgbClr>
+          </a:solidFill>
+          <a:ln w="19050">
+            <a:solidFill>
+              <a:srgbClr val="FFFFFF"/>
+            </a:solidFill>
+          </a:ln>
+          <a:effectLst>
+            <a:outerShdw blurRad="203200" dist="50800" dir="5400000" algn="t" rotWithShape="0">
+              <a:srgbClr val="1A2340">
+                <a:alpha val="20000"/>
+              </a:srgbClr>
+            </a:outerShdw>
+          </a:effectLst>
+        </p:spPr>
+        <p:style>
+          <a:lnRef idx="1">
+            <a:schemeClr val="accent1"/>
+          </a:lnRef>
+          <a:fillRef idx="3">
+            <a:schemeClr val="accent1"/>
+          </a:fillRef>
+          <a:effectRef idx="2">
+            <a:schemeClr val="accent1"/>
+          </a:effectRef>
+          <a:fontRef idx="minor">
+            <a:schemeClr val="lt1"/>
+          </a:fontRef>
+        </p:style>
+        <p:txBody>
+          <a:bodyPr rtlCol="0" anchor="ctr"/>
+          <a:lstStyle/>
+          <a:p>
+            <a:pPr algn="ctr"/>
+          </a:p>
+        </p:txBody>
+      </p:sp>
+      <p:sp>
+        <p:nvSpPr>
+          <p:cNvPr id="12" name="Rounded Rectangle 11"/>
+          <p:cNvSpPr/>
+          <p:nvPr/>
+        </p:nvSpPr>
+        <p:spPr>
+          <a:xfrm>
+            <a:off x="731519" y="1508760"/>
+            <a:ext cx="10728655" cy="32004"/>
+          </a:xfrm>
+          <a:prstGeom prst="roundRect">
+            <a:avLst>
+              <a:gd name="adj" fmla="val 50000"/>
+            </a:avLst>
+          </a:prstGeom>
+          <a:solidFill>
+            <a:srgbClr val="FFFFFF">
+              <a:alpha val="85000"/>
+            </a:srgbClr>
+          </a:solidFill>
+          <a:ln>
+            <a:noFill/>
+          </a:ln>
+          <a:effectLst/>
+        </p:spPr>
+        <p:style>
+          <a:lnRef idx="1">
+            <a:schemeClr val="accent1"/>
+          </a:lnRef>
+          <a:fillRef idx="3">
+            <a:schemeClr val="accent1"/>
+          </a:fillRef>
+          <a:effectRef idx="2">
+            <a:schemeClr val="accent1"/>
+          </a:effectRef>
+          <a:fontRef idx="minor">
+            <a:schemeClr val="lt1"/>
+          </a:fontRef>
+        </p:style>
+        <p:txBody>
+          <a:bodyPr rtlCol="0" anchor="ctr"/>
+          <a:lstStyle/>
+          <a:p>
+            <a:pPr algn="ctr"/>
+          </a:p>
+        </p:txBody>
+      </p:sp>
+      <p:sp>
+        <p:nvSpPr>
+          <p:cNvPr id="13" name="Rounded Rectangle 12"/>
+          <p:cNvSpPr/>
+          <p:nvPr/>
+        </p:nvSpPr>
+        <p:spPr>
+          <a:xfrm>
+            <a:off x="548640" y="1591056"/>
+            <a:ext cx="64008" cy="873252"/>
+          </a:xfrm>
+          <a:prstGeom prst="roundRect">
+            <a:avLst>
+              <a:gd name="adj" fmla="val 50000"/>
+            </a:avLst>
+          </a:prstGeom>
+          <a:solidFill>
+            <a:srgbClr val="8D6A2A"/>
+          </a:solidFill>
+          <a:ln>
+            <a:noFill/>
+          </a:ln>
+          <a:effectLst>
+            <a:outerShdw blurRad="203200" dist="50800" dir="5400000" algn="t" rotWithShape="0">
+              <a:srgbClr val="1A2340">
+                <a:alpha val="20000"/>
+              </a:srgbClr>
+            </a:outerShdw>
+          </a:effectLst>
+          <a:scene3d>
+            <a:camera prst="orthographicFront"/>
+            <a:lightRig rig="threePt" dir="t"/>
+          </a:scene3d>
+          <a:sp3d>
+            <a:bevelT w="44450" h="25400" prst="softRound"/>
+          </a:sp3d>
+        </p:spPr>
+        <p:style>
+          <a:lnRef idx="1">
+            <a:schemeClr val="accent1"/>
+          </a:lnRef>
+          <a:fillRef idx="3">
+            <a:schemeClr val="accent1"/>
+          </a:fillRef>
+          <a:effectRef idx="2">
+            <a:schemeClr val="accent1"/>
+          </a:effectRef>
+          <a:fontRef idx="minor">
+            <a:schemeClr val="lt1"/>
+          </a:fontRef>
+        </p:style>
+        <p:txBody>
+          <a:bodyPr rtlCol="0" anchor="ctr"/>
+          <a:lstStyle/>
+          <a:p>
+            <a:pPr algn="ctr"/>
+          </a:p>
+        </p:txBody>
+      </p:sp>
+      <p:sp>
+        <p:nvSpPr>
+          <p:cNvPr id="14" name="TextBox 13"/>
           <p:cNvSpPr txBox="1"/>
           <p:nvPr/>
         </p:nvSpPr>
         <p:spPr>
           <a:xfrm>
-            <a:off x="548640" y="1554480"/>
-            <a:ext cx="11094415" cy="1389888"/>
+            <a:off x="777240" y="1554480"/>
+            <a:ext cx="10865815" cy="1389888"/>
           </a:xfrm>
           <a:prstGeom prst="rect">
             <a:avLst/>
@@ -22889,9 +25146,63 @@
           </a:p>
         </p:txBody>
       </p:sp>
+      <p:sp>
+        <p:nvSpPr>
+          <p:cNvPr id="15" name="Rounded Rectangle 14"/>
+          <p:cNvSpPr/>
+          <p:nvPr/>
+        </p:nvSpPr>
+        <p:spPr>
+          <a:xfrm>
+            <a:off x="548640" y="3127248"/>
+            <a:ext cx="11094415" cy="3044952"/>
+          </a:xfrm>
+          <a:prstGeom prst="roundRect">
+            <a:avLst>
+              <a:gd name="adj" fmla="val 3000"/>
+            </a:avLst>
+          </a:prstGeom>
+          <a:solidFill>
+            <a:srgbClr val="FFFFFF"/>
+          </a:solidFill>
+          <a:ln w="9525">
+            <a:solidFill>
+              <a:srgbClr val="DDDFEE"/>
+            </a:solidFill>
+          </a:ln>
+          <a:effectLst>
+            <a:outerShdw blurRad="203200" dist="50800" dir="5400000" algn="t" rotWithShape="0">
+              <a:srgbClr val="1A2340">
+                <a:alpha val="20000"/>
+              </a:srgbClr>
+            </a:outerShdw>
+          </a:effectLst>
+        </p:spPr>
+        <p:style>
+          <a:lnRef idx="1">
+            <a:schemeClr val="accent1"/>
+          </a:lnRef>
+          <a:fillRef idx="3">
+            <a:schemeClr val="accent1"/>
+          </a:fillRef>
+          <a:effectRef idx="2">
+            <a:schemeClr val="accent1"/>
+          </a:effectRef>
+          <a:fontRef idx="minor">
+            <a:schemeClr val="lt1"/>
+          </a:fontRef>
+        </p:style>
+        <p:txBody>
+          <a:bodyPr rtlCol="0" anchor="ctr"/>
+          <a:lstStyle/>
+          <a:p>
+            <a:pPr algn="ctr"/>
+          </a:p>
+        </p:txBody>
+      </p:sp>
       <p:pic>
         <p:nvPicPr>
-          <p:cNvPr id="12" name="Picture 11" descr="Left: glutamate nerve ending with Na+ channels, the alpha-2-delta Ca2+ subunit and SV2A, and postsynaptic AMPA receptors, with the drugs acting at each. Right: GABA nerve ending with GABA transaminase blocked by valproate, the GABA-A receptor enhanced by benzodiazepines and phenobarbital, and thalamic T-type Ca2+ channels blocked by ethosuximide."/>
+          <p:cNvPr id="16" name="Picture 15" descr="Left: glutamate nerve ending with Na+ channels, the alpha-2-delta Ca2+ subunit and SV2A, and postsynaptic AMPA receptors, with the drugs acting at each. Right: GABA nerve ending with GABA transaminase blocked by valproate, the GABA-A receptor enhanced by benzodiazepines and phenobarbital, and thalamic T-type Ca2+ channels blocked by ethosuximide."/>
           <p:cNvPicPr>
             <a:picLocks noChangeAspect="1"/>
           </p:cNvPicPr>
@@ -22905,8 +25216,8 @@
         </p:blipFill>
         <p:spPr>
           <a:xfrm>
-            <a:off x="3450519" y="3127248"/>
-            <a:ext cx="5290657" cy="2587752"/>
+            <a:off x="3637468" y="3236976"/>
+            <a:ext cx="4916758" cy="2404872"/>
           </a:xfrm>
           <a:prstGeom prst="rect">
             <a:avLst/>
@@ -22915,14 +25226,14 @@
       </p:pic>
       <p:sp>
         <p:nvSpPr>
-          <p:cNvPr id="13" name="TextBox 12"/>
+          <p:cNvPr id="17" name="TextBox 16"/>
           <p:cNvSpPr txBox="1"/>
           <p:nvPr/>
         </p:nvSpPr>
         <p:spPr>
           <a:xfrm>
-            <a:off x="548640" y="5806440"/>
-            <a:ext cx="11094415" cy="365760"/>
+            <a:off x="685800" y="5733288"/>
+            <a:ext cx="10820095" cy="365760"/>
           </a:xfrm>
           <a:prstGeom prst="rect">
             <a:avLst/>
@@ -23329,9 +25640,113 @@
           </a:prstGeom>
         </p:spPr>
       </p:pic>
+      <p:sp>
+        <p:nvSpPr>
+          <p:cNvPr id="11" name="Rounded Rectangle 10"/>
+          <p:cNvSpPr/>
+          <p:nvPr/>
+        </p:nvSpPr>
+        <p:spPr>
+          <a:xfrm>
+            <a:off x="411479" y="1444752"/>
+            <a:ext cx="11368735" cy="4800600"/>
+          </a:xfrm>
+          <a:prstGeom prst="roundRect">
+            <a:avLst>
+              <a:gd name="adj" fmla="val 4000"/>
+            </a:avLst>
+          </a:prstGeom>
+          <a:solidFill>
+            <a:srgbClr val="FFFFFF">
+              <a:alpha val="84000"/>
+            </a:srgbClr>
+          </a:solidFill>
+          <a:ln w="19050">
+            <a:solidFill>
+              <a:srgbClr val="FFFFFF"/>
+            </a:solidFill>
+          </a:ln>
+          <a:effectLst>
+            <a:outerShdw blurRad="203200" dist="50800" dir="5400000" algn="t" rotWithShape="0">
+              <a:srgbClr val="1A2340">
+                <a:alpha val="20000"/>
+              </a:srgbClr>
+            </a:outerShdw>
+          </a:effectLst>
+        </p:spPr>
+        <p:style>
+          <a:lnRef idx="1">
+            <a:schemeClr val="accent1"/>
+          </a:lnRef>
+          <a:fillRef idx="3">
+            <a:schemeClr val="accent1"/>
+          </a:fillRef>
+          <a:effectRef idx="2">
+            <a:schemeClr val="accent1"/>
+          </a:effectRef>
+          <a:fontRef idx="minor">
+            <a:schemeClr val="lt1"/>
+          </a:fontRef>
+        </p:style>
+        <p:txBody>
+          <a:bodyPr rtlCol="0" anchor="ctr"/>
+          <a:lstStyle/>
+          <a:p>
+            <a:pPr algn="ctr"/>
+          </a:p>
+        </p:txBody>
+      </p:sp>
+      <p:sp>
+        <p:nvSpPr>
+          <p:cNvPr id="12" name="Rounded Rectangle 11"/>
+          <p:cNvSpPr/>
+          <p:nvPr/>
+        </p:nvSpPr>
+        <p:spPr>
+          <a:xfrm>
+            <a:off x="731519" y="1508760"/>
+            <a:ext cx="10728655" cy="32004"/>
+          </a:xfrm>
+          <a:prstGeom prst="roundRect">
+            <a:avLst>
+              <a:gd name="adj" fmla="val 50000"/>
+            </a:avLst>
+          </a:prstGeom>
+          <a:solidFill>
+            <a:srgbClr val="FFFFFF">
+              <a:alpha val="85000"/>
+            </a:srgbClr>
+          </a:solidFill>
+          <a:ln>
+            <a:noFill/>
+          </a:ln>
+          <a:effectLst/>
+        </p:spPr>
+        <p:style>
+          <a:lnRef idx="1">
+            <a:schemeClr val="accent1"/>
+          </a:lnRef>
+          <a:fillRef idx="3">
+            <a:schemeClr val="accent1"/>
+          </a:fillRef>
+          <a:effectRef idx="2">
+            <a:schemeClr val="accent1"/>
+          </a:effectRef>
+          <a:fontRef idx="minor">
+            <a:schemeClr val="lt1"/>
+          </a:fontRef>
+        </p:style>
+        <p:txBody>
+          <a:bodyPr rtlCol="0" anchor="ctr"/>
+          <a:lstStyle/>
+          <a:p>
+            <a:pPr algn="ctr"/>
+          </a:p>
+        </p:txBody>
+      </p:sp>
       <p:graphicFrame>
         <p:nvGraphicFramePr>
-          <p:cNvPr id="11" name="Table 10"/>
+          <p:cNvPr id="13" name="Table 12"/>
           <p:cNvGraphicFramePr>
             <a:graphicFrameLocks noGrp="1"/>
           </p:cNvGraphicFramePr>
@@ -24106,14 +26521,177 @@
       </p:pic>
       <p:sp>
         <p:nvSpPr>
-          <p:cNvPr id="11" name="TextBox 10"/>
+          <p:cNvPr id="11" name="Rounded Rectangle 10"/>
+          <p:cNvSpPr/>
+          <p:nvPr/>
+        </p:nvSpPr>
+        <p:spPr>
+          <a:xfrm>
+            <a:off x="411479" y="1444752"/>
+            <a:ext cx="11368735" cy="4800600"/>
+          </a:xfrm>
+          <a:prstGeom prst="roundRect">
+            <a:avLst>
+              <a:gd name="adj" fmla="val 4000"/>
+            </a:avLst>
+          </a:prstGeom>
+          <a:solidFill>
+            <a:srgbClr val="FFFFFF">
+              <a:alpha val="84000"/>
+            </a:srgbClr>
+          </a:solidFill>
+          <a:ln w="19050">
+            <a:solidFill>
+              <a:srgbClr val="FFFFFF"/>
+            </a:solidFill>
+          </a:ln>
+          <a:effectLst>
+            <a:outerShdw blurRad="203200" dist="50800" dir="5400000" algn="t" rotWithShape="0">
+              <a:srgbClr val="1A2340">
+                <a:alpha val="20000"/>
+              </a:srgbClr>
+            </a:outerShdw>
+          </a:effectLst>
+        </p:spPr>
+        <p:style>
+          <a:lnRef idx="1">
+            <a:schemeClr val="accent1"/>
+          </a:lnRef>
+          <a:fillRef idx="3">
+            <a:schemeClr val="accent1"/>
+          </a:fillRef>
+          <a:effectRef idx="2">
+            <a:schemeClr val="accent1"/>
+          </a:effectRef>
+          <a:fontRef idx="minor">
+            <a:schemeClr val="lt1"/>
+          </a:fontRef>
+        </p:style>
+        <p:txBody>
+          <a:bodyPr rtlCol="0" anchor="ctr"/>
+          <a:lstStyle/>
+          <a:p>
+            <a:pPr algn="ctr"/>
+          </a:p>
+        </p:txBody>
+      </p:sp>
+      <p:sp>
+        <p:nvSpPr>
+          <p:cNvPr id="12" name="Rounded Rectangle 11"/>
+          <p:cNvSpPr/>
+          <p:nvPr/>
+        </p:nvSpPr>
+        <p:spPr>
+          <a:xfrm>
+            <a:off x="731519" y="1508760"/>
+            <a:ext cx="10728655" cy="32004"/>
+          </a:xfrm>
+          <a:prstGeom prst="roundRect">
+            <a:avLst>
+              <a:gd name="adj" fmla="val 50000"/>
+            </a:avLst>
+          </a:prstGeom>
+          <a:solidFill>
+            <a:srgbClr val="FFFFFF">
+              <a:alpha val="85000"/>
+            </a:srgbClr>
+          </a:solidFill>
+          <a:ln>
+            <a:noFill/>
+          </a:ln>
+          <a:effectLst/>
+        </p:spPr>
+        <p:style>
+          <a:lnRef idx="1">
+            <a:schemeClr val="accent1"/>
+          </a:lnRef>
+          <a:fillRef idx="3">
+            <a:schemeClr val="accent1"/>
+          </a:fillRef>
+          <a:effectRef idx="2">
+            <a:schemeClr val="accent1"/>
+          </a:effectRef>
+          <a:fontRef idx="minor">
+            <a:schemeClr val="lt1"/>
+          </a:fontRef>
+        </p:style>
+        <p:txBody>
+          <a:bodyPr rtlCol="0" anchor="ctr"/>
+          <a:lstStyle/>
+          <a:p>
+            <a:pPr algn="ctr"/>
+          </a:p>
+        </p:txBody>
+      </p:sp>
+      <p:sp>
+        <p:nvSpPr>
+          <p:cNvPr id="13" name="Rounded Rectangle 12"/>
+          <p:cNvSpPr/>
+          <p:nvPr/>
+        </p:nvSpPr>
+        <p:spPr>
+          <a:xfrm>
+            <a:off x="548640" y="1591056"/>
+            <a:ext cx="64008" cy="2026666"/>
+          </a:xfrm>
+          <a:prstGeom prst="roundRect">
+            <a:avLst>
+              <a:gd name="adj" fmla="val 50000"/>
+            </a:avLst>
+          </a:prstGeom>
+          <a:solidFill>
+            <a:srgbClr val="8D6A2A"/>
+          </a:solidFill>
+          <a:ln>
+            <a:noFill/>
+          </a:ln>
+          <a:effectLst>
+            <a:outerShdw blurRad="203200" dist="50800" dir="5400000" algn="t" rotWithShape="0">
+              <a:srgbClr val="1A2340">
+                <a:alpha val="20000"/>
+              </a:srgbClr>
+            </a:outerShdw>
+          </a:effectLst>
+          <a:scene3d>
+            <a:camera prst="orthographicFront"/>
+            <a:lightRig rig="threePt" dir="t"/>
+          </a:scene3d>
+          <a:sp3d>
+            <a:bevelT w="44450" h="25400" prst="softRound"/>
+          </a:sp3d>
+        </p:spPr>
+        <p:style>
+          <a:lnRef idx="1">
+            <a:schemeClr val="accent1"/>
+          </a:lnRef>
+          <a:fillRef idx="3">
+            <a:schemeClr val="accent1"/>
+          </a:fillRef>
+          <a:effectRef idx="2">
+            <a:schemeClr val="accent1"/>
+          </a:effectRef>
+          <a:fontRef idx="minor">
+            <a:schemeClr val="lt1"/>
+          </a:fontRef>
+        </p:style>
+        <p:txBody>
+          <a:bodyPr rtlCol="0" anchor="ctr"/>
+          <a:lstStyle/>
+          <a:p>
+            <a:pPr algn="ctr"/>
+          </a:p>
+        </p:txBody>
+      </p:sp>
+      <p:sp>
+        <p:nvSpPr>
+          <p:cNvPr id="14" name="TextBox 13"/>
           <p:cNvSpPr txBox="1"/>
           <p:nvPr/>
         </p:nvSpPr>
         <p:spPr>
           <a:xfrm>
-            <a:off x="548640" y="1554480"/>
-            <a:ext cx="4480560" cy="4617720"/>
+            <a:off x="777240" y="1554480"/>
+            <a:ext cx="4251960" cy="4617720"/>
           </a:xfrm>
           <a:prstGeom prst="rect">
             <a:avLst/>
@@ -24179,7 +26757,7 @@
       </p:sp>
       <p:sp>
         <p:nvSpPr>
-          <p:cNvPr id="12" name="Oval 11"/>
+          <p:cNvPr id="15" name="Oval 14"/>
           <p:cNvSpPr/>
           <p:nvPr/>
         </p:nvSpPr>
@@ -24232,7 +26810,7 @@
       </p:sp>
       <p:sp>
         <p:nvSpPr>
-          <p:cNvPr id="13" name="TextBox 12"/>
+          <p:cNvPr id="16" name="TextBox 15"/>
           <p:cNvSpPr txBox="1"/>
           <p:nvPr/>
         </p:nvSpPr>
@@ -24266,7 +26844,7 @@
       </p:sp>
       <p:sp>
         <p:nvSpPr>
-          <p:cNvPr id="14" name="Oval 13"/>
+          <p:cNvPr id="17" name="Oval 16"/>
           <p:cNvSpPr/>
           <p:nvPr/>
         </p:nvSpPr>
@@ -24319,7 +26897,7 @@
       </p:sp>
       <p:sp>
         <p:nvSpPr>
-          <p:cNvPr id="15" name="TextBox 14"/>
+          <p:cNvPr id="18" name="TextBox 17"/>
           <p:cNvSpPr txBox="1"/>
           <p:nvPr/>
         </p:nvSpPr>
@@ -24353,7 +26931,7 @@
       </p:sp>
       <p:sp>
         <p:nvSpPr>
-          <p:cNvPr id="16" name="Oval 15"/>
+          <p:cNvPr id="19" name="Oval 18"/>
           <p:cNvSpPr/>
           <p:nvPr/>
         </p:nvSpPr>
@@ -24406,7 +26984,7 @@
       </p:sp>
       <p:sp>
         <p:nvSpPr>
-          <p:cNvPr id="17" name="TextBox 16"/>
+          <p:cNvPr id="20" name="TextBox 19"/>
           <p:cNvSpPr txBox="1"/>
           <p:nvPr/>
         </p:nvSpPr>
@@ -24440,7 +27018,7 @@
       </p:sp>
       <p:sp>
         <p:nvSpPr>
-          <p:cNvPr id="18" name="Oval 17"/>
+          <p:cNvPr id="21" name="Oval 20"/>
           <p:cNvSpPr/>
           <p:nvPr/>
         </p:nvSpPr>
@@ -24493,7 +27071,7 @@
       </p:sp>
       <p:sp>
         <p:nvSpPr>
-          <p:cNvPr id="19" name="TextBox 18"/>
+          <p:cNvPr id="22" name="TextBox 21"/>
           <p:cNvSpPr txBox="1"/>
           <p:nvPr/>
         </p:nvSpPr>
@@ -24527,7 +27105,7 @@
       </p:sp>
       <p:sp>
         <p:nvSpPr>
-          <p:cNvPr id="20" name="Oval 19"/>
+          <p:cNvPr id="23" name="Oval 22"/>
           <p:cNvSpPr/>
           <p:nvPr/>
         </p:nvSpPr>
@@ -24580,7 +27158,7 @@
       </p:sp>
       <p:sp>
         <p:nvSpPr>
-          <p:cNvPr id="21" name="TextBox 20"/>
+          <p:cNvPr id="24" name="TextBox 23"/>
           <p:cNvSpPr txBox="1"/>
           <p:nvPr/>
         </p:nvSpPr>
@@ -24614,7 +27192,7 @@
       </p:sp>
       <p:sp>
         <p:nvSpPr>
-          <p:cNvPr id="22" name="Oval 21"/>
+          <p:cNvPr id="25" name="Oval 24"/>
           <p:cNvSpPr/>
           <p:nvPr/>
         </p:nvSpPr>
@@ -24667,7 +27245,7 @@
       </p:sp>
       <p:sp>
         <p:nvSpPr>
-          <p:cNvPr id="23" name="TextBox 22"/>
+          <p:cNvPr id="26" name="TextBox 25"/>
           <p:cNvSpPr txBox="1"/>
           <p:nvPr/>
         </p:nvSpPr>
@@ -25082,7 +27660,111 @@
       </p:pic>
       <p:sp>
         <p:nvSpPr>
-          <p:cNvPr id="11" name="Oval 10"/>
+          <p:cNvPr id="11" name="Rounded Rectangle 10"/>
+          <p:cNvSpPr/>
+          <p:nvPr/>
+        </p:nvSpPr>
+        <p:spPr>
+          <a:xfrm>
+            <a:off x="411479" y="1444752"/>
+            <a:ext cx="11368735" cy="4800600"/>
+          </a:xfrm>
+          <a:prstGeom prst="roundRect">
+            <a:avLst>
+              <a:gd name="adj" fmla="val 4000"/>
+            </a:avLst>
+          </a:prstGeom>
+          <a:solidFill>
+            <a:srgbClr val="FFFFFF">
+              <a:alpha val="84000"/>
+            </a:srgbClr>
+          </a:solidFill>
+          <a:ln w="19050">
+            <a:solidFill>
+              <a:srgbClr val="FFFFFF"/>
+            </a:solidFill>
+          </a:ln>
+          <a:effectLst>
+            <a:outerShdw blurRad="203200" dist="50800" dir="5400000" algn="t" rotWithShape="0">
+              <a:srgbClr val="1A2340">
+                <a:alpha val="20000"/>
+              </a:srgbClr>
+            </a:outerShdw>
+          </a:effectLst>
+        </p:spPr>
+        <p:style>
+          <a:lnRef idx="1">
+            <a:schemeClr val="accent1"/>
+          </a:lnRef>
+          <a:fillRef idx="3">
+            <a:schemeClr val="accent1"/>
+          </a:fillRef>
+          <a:effectRef idx="2">
+            <a:schemeClr val="accent1"/>
+          </a:effectRef>
+          <a:fontRef idx="minor">
+            <a:schemeClr val="lt1"/>
+          </a:fontRef>
+        </p:style>
+        <p:txBody>
+          <a:bodyPr rtlCol="0" anchor="ctr"/>
+          <a:lstStyle/>
+          <a:p>
+            <a:pPr algn="ctr"/>
+          </a:p>
+        </p:txBody>
+      </p:sp>
+      <p:sp>
+        <p:nvSpPr>
+          <p:cNvPr id="12" name="Rounded Rectangle 11"/>
+          <p:cNvSpPr/>
+          <p:nvPr/>
+        </p:nvSpPr>
+        <p:spPr>
+          <a:xfrm>
+            <a:off x="731519" y="1508760"/>
+            <a:ext cx="10728655" cy="32004"/>
+          </a:xfrm>
+          <a:prstGeom prst="roundRect">
+            <a:avLst>
+              <a:gd name="adj" fmla="val 50000"/>
+            </a:avLst>
+          </a:prstGeom>
+          <a:solidFill>
+            <a:srgbClr val="FFFFFF">
+              <a:alpha val="85000"/>
+            </a:srgbClr>
+          </a:solidFill>
+          <a:ln>
+            <a:noFill/>
+          </a:ln>
+          <a:effectLst/>
+        </p:spPr>
+        <p:style>
+          <a:lnRef idx="1">
+            <a:schemeClr val="accent1"/>
+          </a:lnRef>
+          <a:fillRef idx="3">
+            <a:schemeClr val="accent1"/>
+          </a:fillRef>
+          <a:effectRef idx="2">
+            <a:schemeClr val="accent1"/>
+          </a:effectRef>
+          <a:fontRef idx="minor">
+            <a:schemeClr val="lt1"/>
+          </a:fontRef>
+        </p:style>
+        <p:txBody>
+          <a:bodyPr rtlCol="0" anchor="ctr"/>
+          <a:lstStyle/>
+          <a:p>
+            <a:pPr algn="ctr"/>
+          </a:p>
+        </p:txBody>
+      </p:sp>
+      <p:sp>
+        <p:nvSpPr>
+          <p:cNvPr id="13" name="Oval 12"/>
           <p:cNvSpPr/>
           <p:nvPr/>
         </p:nvSpPr>
@@ -25135,7 +27817,7 @@
       </p:sp>
       <p:sp>
         <p:nvSpPr>
-          <p:cNvPr id="12" name="TextBox 11"/>
+          <p:cNvPr id="14" name="TextBox 13"/>
           <p:cNvSpPr txBox="1"/>
           <p:nvPr/>
         </p:nvSpPr>
@@ -25169,7 +27851,7 @@
       </p:sp>
       <p:sp>
         <p:nvSpPr>
-          <p:cNvPr id="13" name="Oval 12"/>
+          <p:cNvPr id="15" name="Oval 14"/>
           <p:cNvSpPr/>
           <p:nvPr/>
         </p:nvSpPr>
@@ -25222,7 +27904,7 @@
       </p:sp>
       <p:sp>
         <p:nvSpPr>
-          <p:cNvPr id="14" name="TextBox 13"/>
+          <p:cNvPr id="16" name="TextBox 15"/>
           <p:cNvSpPr txBox="1"/>
           <p:nvPr/>
         </p:nvSpPr>
@@ -25256,7 +27938,7 @@
       </p:sp>
       <p:sp>
         <p:nvSpPr>
-          <p:cNvPr id="15" name="Oval 14"/>
+          <p:cNvPr id="17" name="Oval 16"/>
           <p:cNvSpPr/>
           <p:nvPr/>
         </p:nvSpPr>
@@ -25309,7 +27991,7 @@
       </p:sp>
       <p:sp>
         <p:nvSpPr>
-          <p:cNvPr id="16" name="TextBox 15"/>
+          <p:cNvPr id="18" name="TextBox 17"/>
           <p:cNvSpPr txBox="1"/>
           <p:nvPr/>
         </p:nvSpPr>
@@ -25343,7 +28025,7 @@
       </p:sp>
       <p:sp>
         <p:nvSpPr>
-          <p:cNvPr id="17" name="Oval 16"/>
+          <p:cNvPr id="19" name="Oval 18"/>
           <p:cNvSpPr/>
           <p:nvPr/>
         </p:nvSpPr>
@@ -25396,7 +28078,7 @@
       </p:sp>
       <p:sp>
         <p:nvSpPr>
-          <p:cNvPr id="18" name="TextBox 17"/>
+          <p:cNvPr id="20" name="TextBox 19"/>
           <p:cNvSpPr txBox="1"/>
           <p:nvPr/>
         </p:nvSpPr>
